--- a/Unit-0/INTRODUCTION.pptx
+++ b/Unit-0/INTRODUCTION.pptx
@@ -23,21 +23,22 @@
     <p:sldId id="267" r:id="rId17"/>
     <p:sldId id="268" r:id="rId18"/>
     <p:sldId id="269" r:id="rId19"/>
+    <p:sldId id="270" r:id="rId20"/>
   </p:sldIdLst>
   <p:sldSz cy="6858000" cx="12192000"/>
   <p:notesSz cx="6858000" cy="9144000"/>
   <p:embeddedFontLst>
     <p:embeddedFont>
       <p:font typeface="Play"/>
-      <p:regular r:id="rId20"/>
-      <p:bold r:id="rId21"/>
+      <p:regular r:id="rId21"/>
+      <p:bold r:id="rId22"/>
     </p:embeddedFont>
     <p:embeddedFont>
       <p:font typeface="Roboto"/>
-      <p:regular r:id="rId22"/>
-      <p:bold r:id="rId23"/>
-      <p:italic r:id="rId24"/>
-      <p:boldItalic r:id="rId25"/>
+      <p:regular r:id="rId23"/>
+      <p:bold r:id="rId24"/>
+      <p:italic r:id="rId25"/>
+      <p:boldItalic r:id="rId26"/>
     </p:embeddedFont>
   </p:embeddedFontLst>
   <p:defaultTextStyle>
@@ -271,7 +272,7 @@
   </p:defaultTextStyle>
   <p:extLst>
     <p:ext uri="GoogleSlidesCustomDataVersion2">
-      <go:slidesCustomData xmlns:go="http://customooxmlschemas.google.com/" r:id="rId26" roundtripDataSignature="AMtx7miYvg7D0q//LPTp0ic4pjLJUBSurQ=="/>
+      <go:slidesCustomData xmlns:go="http://customooxmlschemas.google.com/" r:id="rId27" roundtripDataSignature="AMtx7mh43V1WpXwVBl/HYByHGq5VaOGuiA=="/>
     </p:ext>
   </p:extLst>
 </p:presentation>
@@ -2123,54 +2124,7 @@
       </p:grpSpPr>
       <p:sp>
         <p:nvSpPr>
-          <p:cNvPr id="249" name="Google Shape;249;g2d75afc7928_0_76:notes"/>
-          <p:cNvSpPr txBox="1"/>
-          <p:nvPr>
-            <p:ph idx="1" type="body"/>
-          </p:nvPr>
-        </p:nvSpPr>
-        <p:spPr>
-          <a:xfrm>
-            <a:off x="685800" y="4400550"/>
-            <a:ext cx="5486400" cy="3600600"/>
-          </a:xfrm>
-          <a:prstGeom prst="rect">
-            <a:avLst/>
-          </a:prstGeom>
-          <a:noFill/>
-          <a:ln>
-            <a:noFill/>
-          </a:ln>
-        </p:spPr>
-        <p:txBody>
-          <a:bodyPr anchorCtr="0" anchor="t" bIns="45700" lIns="91425" spcFirstLastPara="1" rIns="91425" wrap="square" tIns="45700">
-            <a:noAutofit/>
-          </a:bodyPr>
-          <a:lstStyle/>
-          <a:p>
-            <a:pPr indent="0" lvl="0" marL="0" rtl="0" algn="l">
-              <a:lnSpc>
-                <a:spcPct val="100000"/>
-              </a:lnSpc>
-              <a:spcBef>
-                <a:spcPts val="0"/>
-              </a:spcBef>
-              <a:spcAft>
-                <a:spcPts val="0"/>
-              </a:spcAft>
-              <a:buSzPts val="1400"/>
-              <a:buNone/>
-            </a:pPr>
-            <a:r>
-              <a:t/>
-            </a:r>
-            <a:endParaRPr/>
-          </a:p>
-        </p:txBody>
-      </p:sp>
-      <p:sp>
-        <p:nvSpPr>
-          <p:cNvPr id="250" name="Google Shape;250;g2d75afc7928_0_76:notes"/>
+          <p:cNvPr id="249" name="Google Shape;249;g325cb273146_0_2:notes"/>
           <p:cNvSpPr/>
           <p:nvPr>
             <p:ph idx="2" type="sldImg"/>
@@ -2213,34 +2167,9 @@
           </a:ln>
         </p:spPr>
       </p:sp>
-    </p:spTree>
-  </p:cSld>
-  <p:clrMapOvr>
-    <a:masterClrMapping/>
-  </p:clrMapOvr>
-</p:notes>
-</file>
-
-<file path=ppt/notesSlides/notesSlide13.xml><?xml version="1.0" encoding="utf-8"?>
-<p:notes xmlns:a="http://schemas.openxmlformats.org/drawingml/2006/main" xmlns:r="http://schemas.openxmlformats.org/officeDocument/2006/relationships" xmlns:mc="http://schemas.openxmlformats.org/markup-compatibility/2006" xmlns:mv="urn:schemas-microsoft-com:mac:vml" xmlns:p="http://schemas.openxmlformats.org/presentationml/2006/main" xmlns:c="http://schemas.openxmlformats.org/drawingml/2006/chart" xmlns:dgm="http://schemas.openxmlformats.org/drawingml/2006/diagram" xmlns:o="urn:schemas-microsoft-com:office:office" xmlns:v="urn:schemas-microsoft-com:vml" xmlns:pvml="urn:schemas-microsoft-com:office:powerpoint" xmlns:com="http://schemas.openxmlformats.org/drawingml/2006/compatibility" xmlns:p14="http://schemas.microsoft.com/office/powerpoint/2010/main" xmlns:p15="http://schemas.microsoft.com/office/powerpoint/2012/main" xmlns:ahyp="http://schemas.microsoft.com/office/drawing/2018/hyperlinkcolor" showMasterPhAnim="0" showMasterSp="0">
-  <p:cSld>
-    <p:spTree>
-      <p:nvGrpSpPr>
-        <p:cNvPr id="257" name="Shape 257"/>
-        <p:cNvGrpSpPr/>
-        <p:nvPr/>
-      </p:nvGrpSpPr>
-      <p:grpSpPr>
-        <a:xfrm>
-          <a:off x="0" y="0"/>
-          <a:ext cx="0" cy="0"/>
-          <a:chOff x="0" y="0"/>
-          <a:chExt cx="0" cy="0"/>
-        </a:xfrm>
-      </p:grpSpPr>
       <p:sp>
         <p:nvSpPr>
-          <p:cNvPr id="258" name="Google Shape;258;g2d5b2b5e3c8_0_148:notes"/>
+          <p:cNvPr id="250" name="Google Shape;250;g325cb273146_0_2:notes"/>
           <p:cNvSpPr txBox="1"/>
           <p:nvPr>
             <p:ph idx="1" type="body"/>
@@ -2287,7 +2216,127 @@
       </p:sp>
       <p:sp>
         <p:nvSpPr>
-          <p:cNvPr id="259" name="Google Shape;259;g2d5b2b5e3c8_0_148:notes"/>
+          <p:cNvPr id="251" name="Google Shape;251;g325cb273146_0_2:notes"/>
+          <p:cNvSpPr txBox="1"/>
+          <p:nvPr>
+            <p:ph idx="12" type="sldNum"/>
+          </p:nvPr>
+        </p:nvSpPr>
+        <p:spPr>
+          <a:xfrm>
+            <a:off x="3884613" y="8685213"/>
+            <a:ext cx="2971800" cy="458700"/>
+          </a:xfrm>
+          <a:prstGeom prst="rect">
+            <a:avLst/>
+          </a:prstGeom>
+          <a:noFill/>
+          <a:ln>
+            <a:noFill/>
+          </a:ln>
+        </p:spPr>
+        <p:txBody>
+          <a:bodyPr anchorCtr="0" anchor="b" bIns="45700" lIns="91425" spcFirstLastPara="1" rIns="91425" wrap="square" tIns="45700">
+            <a:noAutofit/>
+          </a:bodyPr>
+          <a:lstStyle/>
+          <a:p>
+            <a:pPr indent="0" lvl="0" marL="0" rtl="0" algn="r">
+              <a:lnSpc>
+                <a:spcPct val="100000"/>
+              </a:lnSpc>
+              <a:spcBef>
+                <a:spcPts val="0"/>
+              </a:spcBef>
+              <a:spcAft>
+                <a:spcPts val="0"/>
+              </a:spcAft>
+              <a:buSzPts val="1400"/>
+              <a:buNone/>
+            </a:pPr>
+            <a:fld id="{00000000-1234-1234-1234-123412341234}" type="slidenum">
+              <a:rPr lang="en-US"/>
+              <a:t>‹#›</a:t>
+            </a:fld>
+            <a:endParaRPr/>
+          </a:p>
+        </p:txBody>
+      </p:sp>
+    </p:spTree>
+  </p:cSld>
+  <p:clrMapOvr>
+    <a:masterClrMapping/>
+  </p:clrMapOvr>
+</p:notes>
+</file>
+
+<file path=ppt/notesSlides/notesSlide13.xml><?xml version="1.0" encoding="utf-8"?>
+<p:notes xmlns:a="http://schemas.openxmlformats.org/drawingml/2006/main" xmlns:r="http://schemas.openxmlformats.org/officeDocument/2006/relationships" xmlns:mc="http://schemas.openxmlformats.org/markup-compatibility/2006" xmlns:mv="urn:schemas-microsoft-com:mac:vml" xmlns:p="http://schemas.openxmlformats.org/presentationml/2006/main" xmlns:c="http://schemas.openxmlformats.org/drawingml/2006/chart" xmlns:dgm="http://schemas.openxmlformats.org/drawingml/2006/diagram" xmlns:o="urn:schemas-microsoft-com:office:office" xmlns:v="urn:schemas-microsoft-com:vml" xmlns:pvml="urn:schemas-microsoft-com:office:powerpoint" xmlns:com="http://schemas.openxmlformats.org/drawingml/2006/compatibility" xmlns:p14="http://schemas.microsoft.com/office/powerpoint/2010/main" xmlns:p15="http://schemas.microsoft.com/office/powerpoint/2012/main" xmlns:ahyp="http://schemas.microsoft.com/office/drawing/2018/hyperlinkcolor" showMasterPhAnim="0" showMasterSp="0">
+  <p:cSld>
+    <p:spTree>
+      <p:nvGrpSpPr>
+        <p:cNvPr id="258" name="Shape 258"/>
+        <p:cNvGrpSpPr/>
+        <p:nvPr/>
+      </p:nvGrpSpPr>
+      <p:grpSpPr>
+        <a:xfrm>
+          <a:off x="0" y="0"/>
+          <a:ext cx="0" cy="0"/>
+          <a:chOff x="0" y="0"/>
+          <a:chExt cx="0" cy="0"/>
+        </a:xfrm>
+      </p:grpSpPr>
+      <p:sp>
+        <p:nvSpPr>
+          <p:cNvPr id="259" name="Google Shape;259;g2d75afc7928_0_76:notes"/>
+          <p:cNvSpPr txBox="1"/>
+          <p:nvPr>
+            <p:ph idx="1" type="body"/>
+          </p:nvPr>
+        </p:nvSpPr>
+        <p:spPr>
+          <a:xfrm>
+            <a:off x="685800" y="4400550"/>
+            <a:ext cx="5486400" cy="3600600"/>
+          </a:xfrm>
+          <a:prstGeom prst="rect">
+            <a:avLst/>
+          </a:prstGeom>
+          <a:noFill/>
+          <a:ln>
+            <a:noFill/>
+          </a:ln>
+        </p:spPr>
+        <p:txBody>
+          <a:bodyPr anchorCtr="0" anchor="t" bIns="45700" lIns="91425" spcFirstLastPara="1" rIns="91425" wrap="square" tIns="45700">
+            <a:noAutofit/>
+          </a:bodyPr>
+          <a:lstStyle/>
+          <a:p>
+            <a:pPr indent="0" lvl="0" marL="0" rtl="0" algn="l">
+              <a:lnSpc>
+                <a:spcPct val="100000"/>
+              </a:lnSpc>
+              <a:spcBef>
+                <a:spcPts val="0"/>
+              </a:spcBef>
+              <a:spcAft>
+                <a:spcPts val="0"/>
+              </a:spcAft>
+              <a:buSzPts val="1400"/>
+              <a:buNone/>
+            </a:pPr>
+            <a:r>
+              <a:t/>
+            </a:r>
+            <a:endParaRPr/>
+          </a:p>
+        </p:txBody>
+      </p:sp>
+      <p:sp>
+        <p:nvSpPr>
+          <p:cNvPr id="260" name="Google Shape;260;g2d75afc7928_0_76:notes"/>
           <p:cNvSpPr/>
           <p:nvPr>
             <p:ph idx="2" type="sldImg"/>
@@ -2343,7 +2392,7 @@
   <p:cSld>
     <p:spTree>
       <p:nvGrpSpPr>
-        <p:cNvPr id="264" name="Shape 264"/>
+        <p:cNvPr id="267" name="Shape 267"/>
         <p:cNvGrpSpPr/>
         <p:nvPr/>
       </p:nvGrpSpPr>
@@ -2357,7 +2406,124 @@
       </p:grpSpPr>
       <p:sp>
         <p:nvSpPr>
-          <p:cNvPr id="265" name="Google Shape;265;g32248793e7f_0_0:notes"/>
+          <p:cNvPr id="268" name="Google Shape;268;g2d5b2b5e3c8_0_148:notes"/>
+          <p:cNvSpPr txBox="1"/>
+          <p:nvPr>
+            <p:ph idx="1" type="body"/>
+          </p:nvPr>
+        </p:nvSpPr>
+        <p:spPr>
+          <a:xfrm>
+            <a:off x="685800" y="4400550"/>
+            <a:ext cx="5486400" cy="3600600"/>
+          </a:xfrm>
+          <a:prstGeom prst="rect">
+            <a:avLst/>
+          </a:prstGeom>
+          <a:noFill/>
+          <a:ln>
+            <a:noFill/>
+          </a:ln>
+        </p:spPr>
+        <p:txBody>
+          <a:bodyPr anchorCtr="0" anchor="t" bIns="45700" lIns="91425" spcFirstLastPara="1" rIns="91425" wrap="square" tIns="45700">
+            <a:noAutofit/>
+          </a:bodyPr>
+          <a:lstStyle/>
+          <a:p>
+            <a:pPr indent="0" lvl="0" marL="0" rtl="0" algn="l">
+              <a:lnSpc>
+                <a:spcPct val="100000"/>
+              </a:lnSpc>
+              <a:spcBef>
+                <a:spcPts val="0"/>
+              </a:spcBef>
+              <a:spcAft>
+                <a:spcPts val="0"/>
+              </a:spcAft>
+              <a:buSzPts val="1400"/>
+              <a:buNone/>
+            </a:pPr>
+            <a:r>
+              <a:t/>
+            </a:r>
+            <a:endParaRPr/>
+          </a:p>
+        </p:txBody>
+      </p:sp>
+      <p:sp>
+        <p:nvSpPr>
+          <p:cNvPr id="269" name="Google Shape;269;g2d5b2b5e3c8_0_148:notes"/>
+          <p:cNvSpPr/>
+          <p:nvPr>
+            <p:ph idx="2" type="sldImg"/>
+          </p:nvPr>
+        </p:nvSpPr>
+        <p:spPr>
+          <a:xfrm>
+            <a:off x="685800" y="1143000"/>
+            <a:ext cx="5486400" cy="3086100"/>
+          </a:xfrm>
+          <a:custGeom>
+            <a:rect b="b" l="l" r="r" t="t"/>
+            <a:pathLst>
+              <a:path extrusionOk="0" h="120000" w="120000">
+                <a:moveTo>
+                  <a:pt x="0" y="0"/>
+                </a:moveTo>
+                <a:lnTo>
+                  <a:pt x="120000" y="0"/>
+                </a:lnTo>
+                <a:lnTo>
+                  <a:pt x="120000" y="120000"/>
+                </a:lnTo>
+                <a:lnTo>
+                  <a:pt x="0" y="120000"/>
+                </a:lnTo>
+                <a:close/>
+              </a:path>
+            </a:pathLst>
+          </a:custGeom>
+          <a:noFill/>
+          <a:ln cap="flat" cmpd="sng" w="12700">
+            <a:solidFill>
+              <a:srgbClr val="000000"/>
+            </a:solidFill>
+            <a:prstDash val="solid"/>
+            <a:round/>
+            <a:headEnd len="sm" w="sm" type="none"/>
+            <a:tailEnd len="sm" w="sm" type="none"/>
+          </a:ln>
+        </p:spPr>
+      </p:sp>
+    </p:spTree>
+  </p:cSld>
+  <p:clrMapOvr>
+    <a:masterClrMapping/>
+  </p:clrMapOvr>
+</p:notes>
+</file>
+
+<file path=ppt/notesSlides/notesSlide15.xml><?xml version="1.0" encoding="utf-8"?>
+<p:notes xmlns:a="http://schemas.openxmlformats.org/drawingml/2006/main" xmlns:r="http://schemas.openxmlformats.org/officeDocument/2006/relationships" xmlns:mc="http://schemas.openxmlformats.org/markup-compatibility/2006" xmlns:mv="urn:schemas-microsoft-com:mac:vml" xmlns:p="http://schemas.openxmlformats.org/presentationml/2006/main" xmlns:c="http://schemas.openxmlformats.org/drawingml/2006/chart" xmlns:dgm="http://schemas.openxmlformats.org/drawingml/2006/diagram" xmlns:o="urn:schemas-microsoft-com:office:office" xmlns:v="urn:schemas-microsoft-com:vml" xmlns:pvml="urn:schemas-microsoft-com:office:powerpoint" xmlns:com="http://schemas.openxmlformats.org/drawingml/2006/compatibility" xmlns:p14="http://schemas.microsoft.com/office/powerpoint/2010/main" xmlns:p15="http://schemas.microsoft.com/office/powerpoint/2012/main" xmlns:ahyp="http://schemas.microsoft.com/office/drawing/2018/hyperlinkcolor" showMasterPhAnim="0" showMasterSp="0">
+  <p:cSld>
+    <p:spTree>
+      <p:nvGrpSpPr>
+        <p:cNvPr id="274" name="Shape 274"/>
+        <p:cNvGrpSpPr/>
+        <p:nvPr/>
+      </p:nvGrpSpPr>
+      <p:grpSpPr>
+        <a:xfrm>
+          <a:off x="0" y="0"/>
+          <a:ext cx="0" cy="0"/>
+          <a:chOff x="0" y="0"/>
+          <a:chExt cx="0" cy="0"/>
+        </a:xfrm>
+      </p:grpSpPr>
+      <p:sp>
+        <p:nvSpPr>
+          <p:cNvPr id="275" name="Google Shape;275;g32248793e7f_0_0:notes"/>
           <p:cNvSpPr/>
           <p:nvPr>
             <p:ph idx="2" type="sldImg"/>
@@ -2402,7 +2568,7 @@
       </p:sp>
       <p:sp>
         <p:nvSpPr>
-          <p:cNvPr id="266" name="Google Shape;266;g32248793e7f_0_0:notes"/>
+          <p:cNvPr id="276" name="Google Shape;276;g32248793e7f_0_0:notes"/>
           <p:cNvSpPr txBox="1"/>
           <p:nvPr>
             <p:ph idx="1" type="body"/>
@@ -2449,7 +2615,7 @@
       </p:sp>
       <p:sp>
         <p:nvSpPr>
-          <p:cNvPr id="267" name="Google Shape;267;g32248793e7f_0_0:notes"/>
+          <p:cNvPr id="277" name="Google Shape;277;g32248793e7f_0_0:notes"/>
           <p:cNvSpPr txBox="1"/>
           <p:nvPr>
             <p:ph idx="12" type="sldNum"/>
@@ -25485,7 +25651,7 @@
           <a:effectLst>
             <a:outerShdw blurRad="50800" rotWithShape="0" algn="l" dist="38100">
               <a:srgbClr val="D8D8D8">
-                <a:alpha val="28627"/>
+                <a:alpha val="28235"/>
               </a:srgbClr>
             </a:outerShdw>
           </a:effectLst>
@@ -26694,13 +26860,13 @@
           </a:custGeom>
           <a:solidFill>
             <a:schemeClr val="accent2">
-              <a:alpha val="74120"/>
+              <a:alpha val="74117"/>
             </a:schemeClr>
           </a:solidFill>
           <a:ln cap="rnd" cmpd="sng" w="44450">
             <a:solidFill>
               <a:schemeClr val="accent2">
-                <a:alpha val="74120"/>
+                <a:alpha val="74117"/>
               </a:schemeClr>
             </a:solidFill>
             <a:prstDash val="solid"/>
@@ -27641,6 +27807,7 @@
               <a:spcAft>
                 <a:spcPts val="0"/>
               </a:spcAft>
+              <a:buSzPct val="75630"/>
               <a:buNone/>
             </a:pPr>
             <a:r>
@@ -27665,7 +27832,7 @@
             </a:pPr>
             <a:r>
               <a:rPr lang="en-US"/>
-              <a:t>Python 3.10.12</a:t>
+              <a:t>Python 3.10.11</a:t>
             </a:r>
             <a:endParaRPr/>
           </a:p>
@@ -27680,6 +27847,7 @@
               <a:spcAft>
                 <a:spcPts val="0"/>
               </a:spcAft>
+              <a:buSzPct val="75630"/>
               <a:buNone/>
             </a:pPr>
             <a:r>
@@ -27842,7 +28010,7 @@
           </a:bodyPr>
           <a:lstStyle/>
           <a:p>
-            <a:pPr indent="-377825" lvl="0" marL="457200" rtl="0" algn="l">
+            <a:pPr indent="-377825" lvl="0" marL="457200" marR="0" rtl="0" algn="l">
               <a:lnSpc>
                 <a:spcPct val="150000"/>
               </a:lnSpc>
@@ -27856,24 +28024,41 @@
                 <a:schemeClr val="dk1"/>
               </a:buClr>
               <a:buSzPts val="2350"/>
+              <a:buFont typeface="Arial"/>
               <a:buChar char="●"/>
             </a:pPr>
+            <a:r>
+              <a:rPr b="0" i="0" lang="en-US" sz="2350" u="none" cap="none" strike="noStrike">
+                <a:solidFill>
+                  <a:schemeClr val="dk1"/>
+                </a:solidFill>
+                <a:latin typeface="Arial"/>
+                <a:ea typeface="Arial"/>
+                <a:cs typeface="Arial"/>
+                <a:sym typeface="Arial"/>
+              </a:rPr>
+              <a:t>torch: </a:t>
+            </a:r>
             <a:r>
               <a:rPr lang="en-US" sz="2350">
                 <a:solidFill>
                   <a:schemeClr val="dk1"/>
                 </a:solidFill>
               </a:rPr>
-              <a:t>torch: 2.5.1 + cu121</a:t>
+              <a:t>2.3.1 + cu121</a:t>
             </a:r>
-            <a:endParaRPr sz="2350">
+            <a:endParaRPr b="0" i="0" sz="2350" u="none" cap="none" strike="noStrike">
               <a:solidFill>
                 <a:schemeClr val="dk1"/>
               </a:solidFill>
+              <a:latin typeface="Arial"/>
+              <a:ea typeface="Arial"/>
+              <a:cs typeface="Arial"/>
+              <a:sym typeface="Arial"/>
             </a:endParaRPr>
           </a:p>
           <a:p>
-            <a:pPr indent="-377825" lvl="0" marL="457200" rtl="0" algn="l">
+            <a:pPr indent="-377825" lvl="0" marL="457200" marR="0" rtl="0" algn="l">
               <a:lnSpc>
                 <a:spcPct val="150000"/>
               </a:lnSpc>
@@ -27887,39 +28072,60 @@
                 <a:schemeClr val="dk1"/>
               </a:buClr>
               <a:buSzPts val="2350"/>
+              <a:buFont typeface="Arial"/>
               <a:buChar char="●"/>
             </a:pPr>
             <a:r>
-              <a:rPr lang="en-US" sz="2350">
+              <a:rPr b="0" i="0" lang="en-US" sz="2350" u="none" cap="none" strike="noStrike">
                 <a:solidFill>
                   <a:schemeClr val="dk1"/>
                 </a:solidFill>
+                <a:latin typeface="Arial"/>
+                <a:ea typeface="Arial"/>
+                <a:cs typeface="Arial"/>
+                <a:sym typeface="Arial"/>
               </a:rPr>
               <a:t>keras: 3.5.0</a:t>
             </a:r>
-            <a:endParaRPr sz="2350">
+            <a:endParaRPr b="0" i="0" sz="2350" u="none" cap="none" strike="noStrike">
               <a:solidFill>
                 <a:schemeClr val="dk1"/>
               </a:solidFill>
+              <a:latin typeface="Arial"/>
+              <a:ea typeface="Arial"/>
+              <a:cs typeface="Arial"/>
+              <a:sym typeface="Arial"/>
             </a:endParaRPr>
           </a:p>
           <a:p>
-            <a:pPr indent="0" lvl="0" marL="0" rtl="0" algn="l">
-              <a:spcBef>
-                <a:spcPts val="0"/>
-              </a:spcBef>
-              <a:spcAft>
-                <a:spcPts val="0"/>
-              </a:spcAft>
+            <a:pPr indent="0" lvl="0" marL="0" marR="0" rtl="0" algn="l">
+              <a:lnSpc>
+                <a:spcPct val="100000"/>
+              </a:lnSpc>
+              <a:spcBef>
+                <a:spcPts val="0"/>
+              </a:spcBef>
+              <a:spcAft>
+                <a:spcPts val="0"/>
+              </a:spcAft>
+              <a:buClr>
+                <a:srgbClr val="000000"/>
+              </a:buClr>
+              <a:buSzPts val="2800"/>
+              <a:buFont typeface="Arial"/>
               <a:buNone/>
             </a:pPr>
             <a:r>
               <a:t/>
             </a:r>
-            <a:endParaRPr sz="2800">
+            <a:endParaRPr b="0" i="0" sz="2800" u="none" cap="none" strike="noStrike">
               <a:solidFill>
                 <a:schemeClr val="dk1"/>
               </a:solidFill>
+              <a:latin typeface="Arial"/>
+              <a:ea typeface="Arial"/>
+              <a:cs typeface="Arial"/>
+              <a:sym typeface="Arial"/>
             </a:endParaRPr>
           </a:p>
         </p:txBody>
@@ -27944,7 +28150,7 @@
     </p:bg>
     <p:spTree>
       <p:nvGrpSpPr>
-        <p:cNvPr id="251" name="Shape 251"/>
+        <p:cNvPr id="252" name="Shape 252"/>
         <p:cNvGrpSpPr/>
         <p:nvPr/>
       </p:nvGrpSpPr>
@@ -27958,14 +28164,14 @@
       </p:grpSpPr>
       <p:sp>
         <p:nvSpPr>
-          <p:cNvPr id="252" name="Google Shape;252;g2d75afc7928_0_76"/>
+          <p:cNvPr id="253" name="Google Shape;253;g325cb273146_0_2"/>
           <p:cNvSpPr/>
           <p:nvPr/>
         </p:nvSpPr>
         <p:spPr>
           <a:xfrm>
-            <a:off x="0" y="0"/>
-            <a:ext cx="12189300" cy="6858000"/>
+            <a:off x="1505" y="0"/>
+            <a:ext cx="12189000" cy="6858000"/>
           </a:xfrm>
           <a:prstGeom prst="rect">
             <a:avLst/>
@@ -27996,14 +28202,14 @@
               <a:buClr>
                 <a:srgbClr val="000000"/>
               </a:buClr>
-              <a:buSzPts val="1900"/>
+              <a:buSzPts val="1800"/>
               <a:buFont typeface="Arial"/>
               <a:buNone/>
             </a:pPr>
             <a:r>
               <a:t/>
             </a:r>
-            <a:endParaRPr b="0" i="0" sz="1900" u="none" cap="none" strike="noStrike">
+            <a:endParaRPr b="0" i="0" sz="1800" u="none" cap="none" strike="noStrike">
               <a:solidFill>
                 <a:schemeClr val="lt1"/>
               </a:solidFill>
@@ -28017,7 +28223,7 @@
       </p:sp>
       <p:sp>
         <p:nvSpPr>
-          <p:cNvPr id="253" name="Google Shape;253;g2d75afc7928_0_76"/>
+          <p:cNvPr id="254" name="Google Shape;254;g325cb273146_0_2"/>
           <p:cNvSpPr txBox="1"/>
           <p:nvPr>
             <p:ph type="title"/>
@@ -28025,8 +28231,8 @@
         </p:nvSpPr>
         <p:spPr>
           <a:xfrm>
-            <a:off x="572493" y="238539"/>
-            <a:ext cx="11018400" cy="1434300"/>
+            <a:off x="838200" y="365125"/>
+            <a:ext cx="10515600" cy="1325700"/>
           </a:xfrm>
           <a:prstGeom prst="rect">
             <a:avLst/>
@@ -28037,7 +28243,7 @@
           </a:ln>
         </p:spPr>
         <p:txBody>
-          <a:bodyPr anchorCtr="0" anchor="b" bIns="45700" lIns="91425" spcFirstLastPara="1" rIns="91425" wrap="square" tIns="45700">
+          <a:bodyPr anchorCtr="0" anchor="ctr" bIns="45700" lIns="91425" spcFirstLastPara="1" rIns="91425" wrap="square" tIns="45700">
             <a:normAutofit/>
           </a:bodyPr>
           <a:lstStyle/>
@@ -28055,18 +28261,13 @@
               <a:buClr>
                 <a:schemeClr val="dk1"/>
               </a:buClr>
-              <a:buSzPts val="5500"/>
+              <a:buSzPts val="5400"/>
               <a:buFont typeface="Play"/>
               <a:buNone/>
             </a:pPr>
             <a:r>
-              <a:rPr lang="en-US">
-                <a:latin typeface="Calibri"/>
-                <a:ea typeface="Calibri"/>
-                <a:cs typeface="Calibri"/>
-                <a:sym typeface="Calibri"/>
-              </a:rPr>
-              <a:t>Let’s Innovate Together!</a:t>
+              <a:rPr lang="en-US" sz="5400"/>
+              <a:t>Project</a:t>
             </a:r>
             <a:endParaRPr/>
           </a:p>
@@ -28074,396 +28275,386 @@
       </p:sp>
       <p:sp>
         <p:nvSpPr>
-          <p:cNvPr id="254" name="Google Shape;254;g2d75afc7928_0_76"/>
+          <p:cNvPr id="255" name="Google Shape;255;g325cb273146_0_2"/>
           <p:cNvSpPr/>
           <p:nvPr/>
         </p:nvSpPr>
         <p:spPr>
           <a:xfrm>
-            <a:off x="572493" y="1681544"/>
-            <a:ext cx="10972800" cy="18288"/>
+            <a:off x="669036" y="1677373"/>
+            <a:ext cx="10853928" cy="18288"/>
           </a:xfrm>
           <a:custGeom>
             <a:rect b="b" l="l" r="r" t="t"/>
             <a:pathLst>
-              <a:path extrusionOk="0" fill="none" h="18288" w="10972800">
+              <a:path extrusionOk="0" fill="none" h="18288" w="10853928">
                 <a:moveTo>
                   <a:pt x="0" y="0"/>
                 </a:moveTo>
                 <a:cubicBezTo>
-                  <a:pt x="165916" y="-1866"/>
-                  <a:pt x="188720" y="13756"/>
-                  <a:pt x="356616" y="0"/>
-                </a:cubicBezTo>
-                <a:cubicBezTo>
-                  <a:pt x="524512" y="-13756"/>
-                  <a:pt x="734781" y="8922"/>
-                  <a:pt x="1042416" y="0"/>
-                </a:cubicBezTo>
-                <a:cubicBezTo>
-                  <a:pt x="1350051" y="-8922"/>
-                  <a:pt x="1595982" y="-26315"/>
-                  <a:pt x="1947672" y="0"/>
-                </a:cubicBezTo>
-                <a:cubicBezTo>
-                  <a:pt x="2299362" y="26315"/>
-                  <a:pt x="2292691" y="-19526"/>
-                  <a:pt x="2633472" y="0"/>
-                </a:cubicBezTo>
-                <a:cubicBezTo>
-                  <a:pt x="2974253" y="19526"/>
-                  <a:pt x="2857309" y="10773"/>
-                  <a:pt x="2990088" y="0"/>
-                </a:cubicBezTo>
-                <a:cubicBezTo>
-                  <a:pt x="3122867" y="-10773"/>
-                  <a:pt x="3359343" y="7194"/>
-                  <a:pt x="3456432" y="0"/>
-                </a:cubicBezTo>
-                <a:cubicBezTo>
-                  <a:pt x="3553521" y="-7194"/>
-                  <a:pt x="4136258" y="5108"/>
-                  <a:pt x="4361688" y="0"/>
-                </a:cubicBezTo>
-                <a:cubicBezTo>
-                  <a:pt x="4587118" y="-5108"/>
-                  <a:pt x="4992424" y="-42958"/>
-                  <a:pt x="5266944" y="0"/>
-                </a:cubicBezTo>
-                <a:cubicBezTo>
-                  <a:pt x="5541464" y="42958"/>
-                  <a:pt x="5882966" y="-3430"/>
-                  <a:pt x="6172200" y="0"/>
-                </a:cubicBezTo>
-                <a:cubicBezTo>
-                  <a:pt x="6461434" y="3430"/>
-                  <a:pt x="6432127" y="6688"/>
-                  <a:pt x="6528816" y="0"/>
-                </a:cubicBezTo>
-                <a:cubicBezTo>
-                  <a:pt x="6625505" y="-6688"/>
-                  <a:pt x="6916805" y="-436"/>
-                  <a:pt x="7214616" y="0"/>
-                </a:cubicBezTo>
-                <a:cubicBezTo>
-                  <a:pt x="7512427" y="436"/>
-                  <a:pt x="7626159" y="-6909"/>
-                  <a:pt x="7790688" y="0"/>
-                </a:cubicBezTo>
-                <a:cubicBezTo>
-                  <a:pt x="7955217" y="6909"/>
-                  <a:pt x="8048891" y="15307"/>
-                  <a:pt x="8147304" y="0"/>
-                </a:cubicBezTo>
-                <a:cubicBezTo>
-                  <a:pt x="8245717" y="-15307"/>
-                  <a:pt x="8645618" y="-11734"/>
-                  <a:pt x="9052560" y="0"/>
-                </a:cubicBezTo>
-                <a:cubicBezTo>
-                  <a:pt x="9459502" y="11734"/>
-                  <a:pt x="9320584" y="8388"/>
-                  <a:pt x="9409176" y="0"/>
-                </a:cubicBezTo>
-                <a:cubicBezTo>
-                  <a:pt x="9497768" y="-8388"/>
-                  <a:pt x="9644192" y="8379"/>
-                  <a:pt x="9765792" y="0"/>
-                </a:cubicBezTo>
-                <a:cubicBezTo>
-                  <a:pt x="9887392" y="-8379"/>
-                  <a:pt x="10105220" y="-12663"/>
-                  <a:pt x="10341864" y="0"/>
-                </a:cubicBezTo>
-                <a:cubicBezTo>
-                  <a:pt x="10578508" y="12663"/>
-                  <a:pt x="10773103" y="-5786"/>
-                  <a:pt x="10972800" y="0"/>
-                </a:cubicBezTo>
-                <a:cubicBezTo>
-                  <a:pt x="10972146" y="8818"/>
-                  <a:pt x="10972240" y="13823"/>
-                  <a:pt x="10972800" y="18288"/>
-                </a:cubicBezTo>
-                <a:cubicBezTo>
-                  <a:pt x="10588778" y="31598"/>
-                  <a:pt x="10543381" y="-12698"/>
-                  <a:pt x="10177272" y="18288"/>
-                </a:cubicBezTo>
-                <a:cubicBezTo>
-                  <a:pt x="9811163" y="49274"/>
-                  <a:pt x="9996817" y="25662"/>
-                  <a:pt x="9820656" y="18288"/>
-                </a:cubicBezTo>
-                <a:cubicBezTo>
-                  <a:pt x="9644495" y="10914"/>
-                  <a:pt x="9607007" y="31631"/>
-                  <a:pt x="9464040" y="18288"/>
-                </a:cubicBezTo>
-                <a:cubicBezTo>
-                  <a:pt x="9321073" y="4945"/>
-                  <a:pt x="9114189" y="28940"/>
-                  <a:pt x="8778240" y="18288"/>
-                </a:cubicBezTo>
-                <a:cubicBezTo>
-                  <a:pt x="8442291" y="7636"/>
-                  <a:pt x="8594763" y="987"/>
-                  <a:pt x="8421624" y="18288"/>
-                </a:cubicBezTo>
-                <a:cubicBezTo>
-                  <a:pt x="8248485" y="35589"/>
-                  <a:pt x="7929515" y="37573"/>
-                  <a:pt x="7735824" y="18288"/>
-                </a:cubicBezTo>
-                <a:cubicBezTo>
-                  <a:pt x="7542133" y="-997"/>
-                  <a:pt x="7252504" y="33858"/>
-                  <a:pt x="6940296" y="18288"/>
-                </a:cubicBezTo>
-                <a:cubicBezTo>
-                  <a:pt x="6628088" y="2718"/>
-                  <a:pt x="6528503" y="48389"/>
-                  <a:pt x="6254496" y="18288"/>
-                </a:cubicBezTo>
-                <a:cubicBezTo>
-                  <a:pt x="5980489" y="-11813"/>
-                  <a:pt x="5695784" y="-3740"/>
-                  <a:pt x="5458968" y="18288"/>
-                </a:cubicBezTo>
-                <a:cubicBezTo>
-                  <a:pt x="5222152" y="40316"/>
-                  <a:pt x="5010751" y="19095"/>
-                  <a:pt x="4663440" y="18288"/>
-                </a:cubicBezTo>
-                <a:cubicBezTo>
-                  <a:pt x="4316129" y="17481"/>
-                  <a:pt x="4425552" y="1606"/>
-                  <a:pt x="4306824" y="18288"/>
-                </a:cubicBezTo>
-                <a:cubicBezTo>
-                  <a:pt x="4188096" y="34970"/>
-                  <a:pt x="3941535" y="7481"/>
-                  <a:pt x="3840480" y="18288"/>
-                </a:cubicBezTo>
-                <a:cubicBezTo>
-                  <a:pt x="3739425" y="29095"/>
-                  <a:pt x="3402388" y="17641"/>
-                  <a:pt x="3264408" y="18288"/>
-                </a:cubicBezTo>
-                <a:cubicBezTo>
-                  <a:pt x="3126428" y="18935"/>
-                  <a:pt x="2776779" y="9983"/>
-                  <a:pt x="2578608" y="18288"/>
-                </a:cubicBezTo>
-                <a:cubicBezTo>
-                  <a:pt x="2380437" y="26593"/>
-                  <a:pt x="1909468" y="25818"/>
-                  <a:pt x="1673352" y="18288"/>
-                </a:cubicBezTo>
-                <a:cubicBezTo>
-                  <a:pt x="1437236" y="10758"/>
-                  <a:pt x="1131180" y="49884"/>
-                  <a:pt x="877824" y="18288"/>
-                </a:cubicBezTo>
-                <a:cubicBezTo>
-                  <a:pt x="624468" y="-13308"/>
-                  <a:pt x="206753" y="2195"/>
+                  <a:pt x="146993" y="-19076"/>
+                  <a:pt x="347684" y="-4790"/>
+                  <a:pt x="461292" y="0"/>
+                </a:cubicBezTo>
+                <a:cubicBezTo>
+                  <a:pt x="574900" y="4790"/>
+                  <a:pt x="808367" y="19821"/>
+                  <a:pt x="1139662" y="0"/>
+                </a:cubicBezTo>
+                <a:cubicBezTo>
+                  <a:pt x="1470957" y="-19821"/>
+                  <a:pt x="1627405" y="5721"/>
+                  <a:pt x="1926572" y="0"/>
+                </a:cubicBezTo>
+                <a:cubicBezTo>
+                  <a:pt x="2225739" y="-5721"/>
+                  <a:pt x="2137730" y="-3235"/>
+                  <a:pt x="2279325" y="0"/>
+                </a:cubicBezTo>
+                <a:cubicBezTo>
+                  <a:pt x="2420920" y="3235"/>
+                  <a:pt x="2456518" y="9685"/>
+                  <a:pt x="2632078" y="0"/>
+                </a:cubicBezTo>
+                <a:cubicBezTo>
+                  <a:pt x="2807638" y="-9685"/>
+                  <a:pt x="3211516" y="-43007"/>
+                  <a:pt x="3527527" y="0"/>
+                </a:cubicBezTo>
+                <a:cubicBezTo>
+                  <a:pt x="3843538" y="43007"/>
+                  <a:pt x="4058833" y="22042"/>
+                  <a:pt x="4205897" y="0"/>
+                </a:cubicBezTo>
+                <a:cubicBezTo>
+                  <a:pt x="4352961" y="-22042"/>
+                  <a:pt x="4474805" y="-11846"/>
+                  <a:pt x="4558650" y="0"/>
+                </a:cubicBezTo>
+                <a:cubicBezTo>
+                  <a:pt x="4642495" y="11846"/>
+                  <a:pt x="5041928" y="-6069"/>
+                  <a:pt x="5237020" y="0"/>
+                </a:cubicBezTo>
+                <a:cubicBezTo>
+                  <a:pt x="5432112" y="6069"/>
+                  <a:pt x="5943266" y="-17479"/>
+                  <a:pt x="6132469" y="0"/>
+                </a:cubicBezTo>
+                <a:cubicBezTo>
+                  <a:pt x="6321672" y="17479"/>
+                  <a:pt x="6483872" y="26234"/>
+                  <a:pt x="6702301" y="0"/>
+                </a:cubicBezTo>
+                <a:cubicBezTo>
+                  <a:pt x="6920730" y="-26234"/>
+                  <a:pt x="6991194" y="-15156"/>
+                  <a:pt x="7272132" y="0"/>
+                </a:cubicBezTo>
+                <a:cubicBezTo>
+                  <a:pt x="7553070" y="15156"/>
+                  <a:pt x="7684444" y="-32961"/>
+                  <a:pt x="7950502" y="0"/>
+                </a:cubicBezTo>
+                <a:cubicBezTo>
+                  <a:pt x="8216560" y="32961"/>
+                  <a:pt x="8493290" y="-10491"/>
+                  <a:pt x="8737412" y="0"/>
+                </a:cubicBezTo>
+                <a:cubicBezTo>
+                  <a:pt x="8981534" y="10491"/>
+                  <a:pt x="9191586" y="-13899"/>
+                  <a:pt x="9524322" y="0"/>
+                </a:cubicBezTo>
+                <a:cubicBezTo>
+                  <a:pt x="9857058" y="13899"/>
+                  <a:pt x="10297509" y="7485"/>
+                  <a:pt x="10853928" y="0"/>
+                </a:cubicBezTo>
+                <a:cubicBezTo>
+                  <a:pt x="10854574" y="4451"/>
+                  <a:pt x="10854418" y="9226"/>
+                  <a:pt x="10853928" y="18288"/>
+                </a:cubicBezTo>
+                <a:cubicBezTo>
+                  <a:pt x="10691638" y="28522"/>
+                  <a:pt x="10574319" y="29578"/>
+                  <a:pt x="10392636" y="18288"/>
+                </a:cubicBezTo>
+                <a:cubicBezTo>
+                  <a:pt x="10210953" y="6998"/>
+                  <a:pt x="9836277" y="-16742"/>
+                  <a:pt x="9497187" y="18288"/>
+                </a:cubicBezTo>
+                <a:cubicBezTo>
+                  <a:pt x="9158097" y="53318"/>
+                  <a:pt x="9119479" y="30714"/>
+                  <a:pt x="8818817" y="18288"/>
+                </a:cubicBezTo>
+                <a:cubicBezTo>
+                  <a:pt x="8518155" y="5863"/>
+                  <a:pt x="8640037" y="6483"/>
+                  <a:pt x="8466064" y="18288"/>
+                </a:cubicBezTo>
+                <a:cubicBezTo>
+                  <a:pt x="8292091" y="30093"/>
+                  <a:pt x="7997656" y="18914"/>
+                  <a:pt x="7787693" y="18288"/>
+                </a:cubicBezTo>
+                <a:cubicBezTo>
+                  <a:pt x="7577730" y="17662"/>
+                  <a:pt x="7412468" y="21416"/>
+                  <a:pt x="7217862" y="18288"/>
+                </a:cubicBezTo>
+                <a:cubicBezTo>
+                  <a:pt x="7023256" y="15160"/>
+                  <a:pt x="6898018" y="14824"/>
+                  <a:pt x="6648031" y="18288"/>
+                </a:cubicBezTo>
+                <a:cubicBezTo>
+                  <a:pt x="6398044" y="21752"/>
+                  <a:pt x="6254402" y="38625"/>
+                  <a:pt x="6078200" y="18288"/>
+                </a:cubicBezTo>
+                <a:cubicBezTo>
+                  <a:pt x="5901998" y="-2049"/>
+                  <a:pt x="5622886" y="3213"/>
+                  <a:pt x="5508368" y="18288"/>
+                </a:cubicBezTo>
+                <a:cubicBezTo>
+                  <a:pt x="5393850" y="33363"/>
+                  <a:pt x="5036260" y="26830"/>
+                  <a:pt x="4721459" y="18288"/>
+                </a:cubicBezTo>
+                <a:cubicBezTo>
+                  <a:pt x="4406658" y="9746"/>
+                  <a:pt x="4239221" y="41551"/>
+                  <a:pt x="4043088" y="18288"/>
+                </a:cubicBezTo>
+                <a:cubicBezTo>
+                  <a:pt x="3846955" y="-4975"/>
+                  <a:pt x="3818802" y="34658"/>
+                  <a:pt x="3690336" y="18288"/>
+                </a:cubicBezTo>
+                <a:cubicBezTo>
+                  <a:pt x="3561870" y="1918"/>
+                  <a:pt x="3265491" y="42194"/>
+                  <a:pt x="3120504" y="18288"/>
+                </a:cubicBezTo>
+                <a:cubicBezTo>
+                  <a:pt x="2975517" y="-5618"/>
+                  <a:pt x="2720254" y="36673"/>
+                  <a:pt x="2333595" y="18288"/>
+                </a:cubicBezTo>
+                <a:cubicBezTo>
+                  <a:pt x="1946936" y="-97"/>
+                  <a:pt x="2097241" y="5776"/>
+                  <a:pt x="1872303" y="18288"/>
+                </a:cubicBezTo>
+                <a:cubicBezTo>
+                  <a:pt x="1647365" y="30800"/>
+                  <a:pt x="1282708" y="45380"/>
+                  <a:pt x="976854" y="18288"/>
+                </a:cubicBezTo>
+                <a:cubicBezTo>
+                  <a:pt x="671000" y="-8804"/>
+                  <a:pt x="408401" y="-12775"/>
                   <a:pt x="0" y="18288"/>
                 </a:cubicBezTo>
                 <a:cubicBezTo>
-                  <a:pt x="313" y="10654"/>
-                  <a:pt x="-263" y="4056"/>
+                  <a:pt x="-213" y="9468"/>
+                  <a:pt x="187" y="4459"/>
                   <a:pt x="0" y="0"/>
                 </a:cubicBezTo>
                 <a:close/>
               </a:path>
-              <a:path extrusionOk="0" h="18288" w="10972800">
+              <a:path extrusionOk="0" h="18288" w="10853928">
                 <a:moveTo>
                   <a:pt x="0" y="0"/>
                 </a:moveTo>
                 <a:cubicBezTo>
-                  <a:pt x="164017" y="-17675"/>
-                  <a:pt x="309425" y="9913"/>
-                  <a:pt x="466344" y="0"/>
-                </a:cubicBezTo>
-                <a:cubicBezTo>
-                  <a:pt x="623263" y="-9913"/>
-                  <a:pt x="659300" y="-14524"/>
-                  <a:pt x="822960" y="0"/>
-                </a:cubicBezTo>
-                <a:cubicBezTo>
-                  <a:pt x="986620" y="14524"/>
-                  <a:pt x="1105222" y="-16481"/>
-                  <a:pt x="1289304" y="0"/>
-                </a:cubicBezTo>
-                <a:cubicBezTo>
-                  <a:pt x="1473386" y="16481"/>
-                  <a:pt x="1693223" y="26161"/>
-                  <a:pt x="1975104" y="0"/>
-                </a:cubicBezTo>
-                <a:cubicBezTo>
-                  <a:pt x="2256985" y="-26161"/>
-                  <a:pt x="2435781" y="23061"/>
-                  <a:pt x="2770632" y="0"/>
-                </a:cubicBezTo>
-                <a:cubicBezTo>
-                  <a:pt x="3105483" y="-23061"/>
-                  <a:pt x="3247479" y="-44011"/>
-                  <a:pt x="3675888" y="0"/>
-                </a:cubicBezTo>
-                <a:cubicBezTo>
-                  <a:pt x="4104297" y="44011"/>
-                  <a:pt x="4280918" y="4017"/>
-                  <a:pt x="4581144" y="0"/>
-                </a:cubicBezTo>
-                <a:cubicBezTo>
-                  <a:pt x="4881370" y="-4017"/>
-                  <a:pt x="5021699" y="-11889"/>
-                  <a:pt x="5157216" y="0"/>
-                </a:cubicBezTo>
-                <a:cubicBezTo>
-                  <a:pt x="5292733" y="11889"/>
-                  <a:pt x="5603398" y="-17698"/>
-                  <a:pt x="5952744" y="0"/>
-                </a:cubicBezTo>
-                <a:cubicBezTo>
-                  <a:pt x="6302090" y="17698"/>
-                  <a:pt x="6353093" y="-11909"/>
-                  <a:pt x="6638544" y="0"/>
-                </a:cubicBezTo>
-                <a:cubicBezTo>
-                  <a:pt x="6923995" y="11909"/>
-                  <a:pt x="7053404" y="21630"/>
-                  <a:pt x="7214616" y="0"/>
-                </a:cubicBezTo>
-                <a:cubicBezTo>
-                  <a:pt x="7375828" y="-21630"/>
-                  <a:pt x="7837963" y="3886"/>
-                  <a:pt x="8010144" y="0"/>
-                </a:cubicBezTo>
-                <a:cubicBezTo>
-                  <a:pt x="8182325" y="-3886"/>
-                  <a:pt x="8224183" y="16009"/>
-                  <a:pt x="8366760" y="0"/>
-                </a:cubicBezTo>
-                <a:cubicBezTo>
-                  <a:pt x="8509337" y="-16009"/>
-                  <a:pt x="8687920" y="-5720"/>
-                  <a:pt x="8942832" y="0"/>
-                </a:cubicBezTo>
-                <a:cubicBezTo>
-                  <a:pt x="9197744" y="5720"/>
-                  <a:pt x="9368437" y="20479"/>
-                  <a:pt x="9628632" y="0"/>
-                </a:cubicBezTo>
-                <a:cubicBezTo>
-                  <a:pt x="9888827" y="-20479"/>
-                  <a:pt x="10560858" y="-20746"/>
-                  <a:pt x="10972800" y="0"/>
-                </a:cubicBezTo>
-                <a:cubicBezTo>
-                  <a:pt x="10972186" y="5722"/>
-                  <a:pt x="10972980" y="12495"/>
-                  <a:pt x="10972800" y="18288"/>
-                </a:cubicBezTo>
-                <a:cubicBezTo>
-                  <a:pt x="10786146" y="12536"/>
-                  <a:pt x="10623717" y="14033"/>
-                  <a:pt x="10506456" y="18288"/>
-                </a:cubicBezTo>
-                <a:cubicBezTo>
-                  <a:pt x="10389195" y="22543"/>
-                  <a:pt x="10296178" y="20107"/>
-                  <a:pt x="10149840" y="18288"/>
-                </a:cubicBezTo>
-                <a:cubicBezTo>
-                  <a:pt x="10003502" y="16469"/>
-                  <a:pt x="9767530" y="28891"/>
-                  <a:pt x="9464040" y="18288"/>
-                </a:cubicBezTo>
-                <a:cubicBezTo>
-                  <a:pt x="9160550" y="7685"/>
-                  <a:pt x="9229050" y="2659"/>
-                  <a:pt x="8997696" y="18288"/>
-                </a:cubicBezTo>
-                <a:cubicBezTo>
-                  <a:pt x="8766342" y="33917"/>
-                  <a:pt x="8340136" y="34864"/>
-                  <a:pt x="8092440" y="18288"/>
-                </a:cubicBezTo>
-                <a:cubicBezTo>
-                  <a:pt x="7844744" y="1712"/>
-                  <a:pt x="7863720" y="27405"/>
-                  <a:pt x="7735824" y="18288"/>
-                </a:cubicBezTo>
-                <a:cubicBezTo>
-                  <a:pt x="7607928" y="9171"/>
-                  <a:pt x="7323619" y="461"/>
-                  <a:pt x="7050024" y="18288"/>
-                </a:cubicBezTo>
-                <a:cubicBezTo>
-                  <a:pt x="6776429" y="36115"/>
-                  <a:pt x="6787899" y="28206"/>
-                  <a:pt x="6693408" y="18288"/>
-                </a:cubicBezTo>
-                <a:cubicBezTo>
-                  <a:pt x="6598917" y="8370"/>
-                  <a:pt x="6395231" y="19114"/>
-                  <a:pt x="6227064" y="18288"/>
-                </a:cubicBezTo>
-                <a:cubicBezTo>
-                  <a:pt x="6058897" y="17462"/>
-                  <a:pt x="5618582" y="1091"/>
-                  <a:pt x="5431536" y="18288"/>
-                </a:cubicBezTo>
-                <a:cubicBezTo>
-                  <a:pt x="5244490" y="35485"/>
-                  <a:pt x="4729797" y="-9650"/>
-                  <a:pt x="4526280" y="18288"/>
-                </a:cubicBezTo>
-                <a:cubicBezTo>
-                  <a:pt x="4322763" y="46226"/>
-                  <a:pt x="4216797" y="756"/>
-                  <a:pt x="4059936" y="18288"/>
-                </a:cubicBezTo>
-                <a:cubicBezTo>
-                  <a:pt x="3903075" y="35820"/>
-                  <a:pt x="3537912" y="42098"/>
-                  <a:pt x="3374136" y="18288"/>
-                </a:cubicBezTo>
-                <a:cubicBezTo>
-                  <a:pt x="3210360" y="-5522"/>
-                  <a:pt x="3126842" y="39135"/>
-                  <a:pt x="2907792" y="18288"/>
-                </a:cubicBezTo>
-                <a:cubicBezTo>
-                  <a:pt x="2688742" y="-2559"/>
-                  <a:pt x="2490436" y="34100"/>
-                  <a:pt x="2112264" y="18288"/>
-                </a:cubicBezTo>
-                <a:cubicBezTo>
-                  <a:pt x="1734092" y="2476"/>
-                  <a:pt x="1744622" y="-7274"/>
-                  <a:pt x="1536192" y="18288"/>
-                </a:cubicBezTo>
-                <a:cubicBezTo>
-                  <a:pt x="1327762" y="43850"/>
-                  <a:pt x="1189025" y="6435"/>
-                  <a:pt x="1069848" y="18288"/>
-                </a:cubicBezTo>
-                <a:cubicBezTo>
-                  <a:pt x="950671" y="30141"/>
-                  <a:pt x="858345" y="33684"/>
-                  <a:pt x="713232" y="18288"/>
-                </a:cubicBezTo>
-                <a:cubicBezTo>
-                  <a:pt x="568119" y="2892"/>
-                  <a:pt x="250292" y="5410"/>
+                  <a:pt x="267322" y="15284"/>
+                  <a:pt x="415388" y="-21048"/>
+                  <a:pt x="569831" y="0"/>
+                </a:cubicBezTo>
+                <a:cubicBezTo>
+                  <a:pt x="724274" y="21048"/>
+                  <a:pt x="769333" y="-2353"/>
+                  <a:pt x="922584" y="0"/>
+                </a:cubicBezTo>
+                <a:cubicBezTo>
+                  <a:pt x="1075835" y="2353"/>
+                  <a:pt x="1399490" y="-145"/>
+                  <a:pt x="1818033" y="0"/>
+                </a:cubicBezTo>
+                <a:cubicBezTo>
+                  <a:pt x="2236576" y="145"/>
+                  <a:pt x="2145330" y="5482"/>
+                  <a:pt x="2387864" y="0"/>
+                </a:cubicBezTo>
+                <a:cubicBezTo>
+                  <a:pt x="2630398" y="-5482"/>
+                  <a:pt x="2793207" y="18487"/>
+                  <a:pt x="2957695" y="0"/>
+                </a:cubicBezTo>
+                <a:cubicBezTo>
+                  <a:pt x="3122183" y="-18487"/>
+                  <a:pt x="3579141" y="19003"/>
+                  <a:pt x="3853144" y="0"/>
+                </a:cubicBezTo>
+                <a:cubicBezTo>
+                  <a:pt x="4127147" y="-19003"/>
+                  <a:pt x="4209857" y="12211"/>
+                  <a:pt x="4314436" y="0"/>
+                </a:cubicBezTo>
+                <a:cubicBezTo>
+                  <a:pt x="4419015" y="-12211"/>
+                  <a:pt x="4762459" y="-17220"/>
+                  <a:pt x="5209885" y="0"/>
+                </a:cubicBezTo>
+                <a:cubicBezTo>
+                  <a:pt x="5657311" y="17220"/>
+                  <a:pt x="5692663" y="-3290"/>
+                  <a:pt x="6105335" y="0"/>
+                </a:cubicBezTo>
+                <a:cubicBezTo>
+                  <a:pt x="6518007" y="3290"/>
+                  <a:pt x="6455516" y="-5124"/>
+                  <a:pt x="6783705" y="0"/>
+                </a:cubicBezTo>
+                <a:cubicBezTo>
+                  <a:pt x="7111894" y="5124"/>
+                  <a:pt x="7441941" y="-17829"/>
+                  <a:pt x="7679154" y="0"/>
+                </a:cubicBezTo>
+                <a:cubicBezTo>
+                  <a:pt x="7916367" y="17829"/>
+                  <a:pt x="8102967" y="-24363"/>
+                  <a:pt x="8248985" y="0"/>
+                </a:cubicBezTo>
+                <a:cubicBezTo>
+                  <a:pt x="8395003" y="24363"/>
+                  <a:pt x="8552393" y="25505"/>
+                  <a:pt x="8818817" y="0"/>
+                </a:cubicBezTo>
+                <a:cubicBezTo>
+                  <a:pt x="9085241" y="-25505"/>
+                  <a:pt x="9411308" y="38000"/>
+                  <a:pt x="9605726" y="0"/>
+                </a:cubicBezTo>
+                <a:cubicBezTo>
+                  <a:pt x="9800144" y="-38000"/>
+                  <a:pt x="10006468" y="-25741"/>
+                  <a:pt x="10175558" y="0"/>
+                </a:cubicBezTo>
+                <a:cubicBezTo>
+                  <a:pt x="10344648" y="25741"/>
+                  <a:pt x="10696282" y="695"/>
+                  <a:pt x="10853928" y="0"/>
+                </a:cubicBezTo>
+                <a:cubicBezTo>
+                  <a:pt x="10853521" y="8690"/>
+                  <a:pt x="10853774" y="14141"/>
+                  <a:pt x="10853928" y="18288"/>
+                </a:cubicBezTo>
+                <a:cubicBezTo>
+                  <a:pt x="10608124" y="24255"/>
+                  <a:pt x="10343415" y="22307"/>
+                  <a:pt x="10067018" y="18288"/>
+                </a:cubicBezTo>
+                <a:cubicBezTo>
+                  <a:pt x="9790621" y="14270"/>
+                  <a:pt x="9843266" y="3564"/>
+                  <a:pt x="9714266" y="18288"/>
+                </a:cubicBezTo>
+                <a:cubicBezTo>
+                  <a:pt x="9585266" y="33012"/>
+                  <a:pt x="9379484" y="1875"/>
+                  <a:pt x="9252974" y="18288"/>
+                </a:cubicBezTo>
+                <a:cubicBezTo>
+                  <a:pt x="9126464" y="34701"/>
+                  <a:pt x="8580678" y="-4904"/>
+                  <a:pt x="8357525" y="18288"/>
+                </a:cubicBezTo>
+                <a:cubicBezTo>
+                  <a:pt x="8134372" y="41480"/>
+                  <a:pt x="7903199" y="26458"/>
+                  <a:pt x="7679154" y="18288"/>
+                </a:cubicBezTo>
+                <a:cubicBezTo>
+                  <a:pt x="7455109" y="10118"/>
+                  <a:pt x="7435944" y="27109"/>
+                  <a:pt x="7217862" y="18288"/>
+                </a:cubicBezTo>
+                <a:cubicBezTo>
+                  <a:pt x="6999780" y="9467"/>
+                  <a:pt x="6680409" y="18985"/>
+                  <a:pt x="6539492" y="18288"/>
+                </a:cubicBezTo>
+                <a:cubicBezTo>
+                  <a:pt x="6398575" y="17592"/>
+                  <a:pt x="6312077" y="33018"/>
+                  <a:pt x="6186739" y="18288"/>
+                </a:cubicBezTo>
+                <a:cubicBezTo>
+                  <a:pt x="6061401" y="3558"/>
+                  <a:pt x="5947033" y="12075"/>
+                  <a:pt x="5833986" y="18288"/>
+                </a:cubicBezTo>
+                <a:cubicBezTo>
+                  <a:pt x="5720939" y="24501"/>
+                  <a:pt x="5482226" y="8586"/>
+                  <a:pt x="5155616" y="18288"/>
+                </a:cubicBezTo>
+                <a:cubicBezTo>
+                  <a:pt x="4829006" y="27991"/>
+                  <a:pt x="4841274" y="29316"/>
+                  <a:pt x="4694324" y="18288"/>
+                </a:cubicBezTo>
+                <a:cubicBezTo>
+                  <a:pt x="4547374" y="7260"/>
+                  <a:pt x="4077675" y="7013"/>
+                  <a:pt x="3907414" y="18288"/>
+                </a:cubicBezTo>
+                <a:cubicBezTo>
+                  <a:pt x="3737153" y="29564"/>
+                  <a:pt x="3538393" y="21630"/>
+                  <a:pt x="3446122" y="18288"/>
+                </a:cubicBezTo>
+                <a:cubicBezTo>
+                  <a:pt x="3353851" y="14946"/>
+                  <a:pt x="2990320" y="-8091"/>
+                  <a:pt x="2659212" y="18288"/>
+                </a:cubicBezTo>
+                <a:cubicBezTo>
+                  <a:pt x="2328104" y="44667"/>
+                  <a:pt x="2427653" y="9607"/>
+                  <a:pt x="2306460" y="18288"/>
+                </a:cubicBezTo>
+                <a:cubicBezTo>
+                  <a:pt x="2185267" y="26969"/>
+                  <a:pt x="1719763" y="3717"/>
+                  <a:pt x="1519550" y="18288"/>
+                </a:cubicBezTo>
+                <a:cubicBezTo>
+                  <a:pt x="1319337" y="32860"/>
+                  <a:pt x="1167371" y="17040"/>
+                  <a:pt x="1058258" y="18288"/>
+                </a:cubicBezTo>
+                <a:cubicBezTo>
+                  <a:pt x="949145" y="19536"/>
+                  <a:pt x="780234" y="31447"/>
+                  <a:pt x="705505" y="18288"/>
+                </a:cubicBezTo>
+                <a:cubicBezTo>
+                  <a:pt x="630776" y="5129"/>
+                  <a:pt x="215796" y="30056"/>
                   <a:pt x="0" y="18288"/>
                 </a:cubicBezTo>
                 <a:cubicBezTo>
-                  <a:pt x="465" y="13062"/>
-                  <a:pt x="-894" y="9029"/>
+                  <a:pt x="-53" y="11301"/>
+                  <a:pt x="-649" y="7756"/>
                   <a:pt x="0" y="0"/>
                 </a:cubicBezTo>
                 <a:close/>
@@ -28471,15 +28662,11 @@
             </a:pathLst>
           </a:custGeom>
           <a:solidFill>
-            <a:schemeClr val="accent2">
-              <a:alpha val="74117"/>
-            </a:schemeClr>
+            <a:schemeClr val="accent2"/>
           </a:solidFill>
-          <a:ln cap="rnd" cmpd="sng" w="44450">
+          <a:ln cap="rnd" cmpd="sng" w="41275">
             <a:solidFill>
-              <a:schemeClr val="accent2">
-                <a:alpha val="74117"/>
-              </a:schemeClr>
+              <a:schemeClr val="accent2"/>
             </a:solidFill>
             <a:prstDash val="solid"/>
             <a:round/>
@@ -28506,14 +28693,14 @@
               <a:buClr>
                 <a:srgbClr val="000000"/>
               </a:buClr>
-              <a:buSzPts val="1900"/>
+              <a:buSzPts val="1800"/>
               <a:buFont typeface="Arial"/>
               <a:buNone/>
             </a:pPr>
             <a:r>
               <a:t/>
             </a:r>
-            <a:endParaRPr b="0" i="0" sz="1900" u="none" cap="none" strike="noStrike">
+            <a:endParaRPr b="0" i="0" sz="1800" u="none" cap="none" strike="noStrike">
               <a:solidFill>
                 <a:schemeClr val="lt1"/>
               </a:solidFill>
@@ -28527,7 +28714,7 @@
       </p:sp>
       <p:sp>
         <p:nvSpPr>
-          <p:cNvPr id="255" name="Google Shape;255;g2d75afc7928_0_76"/>
+          <p:cNvPr id="256" name="Google Shape;256;g325cb273146_0_2"/>
           <p:cNvSpPr txBox="1"/>
           <p:nvPr>
             <p:ph idx="1" type="body"/>
@@ -28535,8 +28722,8 @@
         </p:nvSpPr>
         <p:spPr>
           <a:xfrm>
-            <a:off x="572500" y="2071300"/>
-            <a:ext cx="10922400" cy="4119300"/>
+            <a:off x="838200" y="1929375"/>
+            <a:ext cx="10684800" cy="4251900"/>
           </a:xfrm>
           <a:prstGeom prst="rect">
             <a:avLst/>
@@ -28548,108 +28735,206 @@
         </p:spPr>
         <p:txBody>
           <a:bodyPr anchorCtr="0" anchor="t" bIns="45700" lIns="91425" spcFirstLastPara="1" rIns="91425" wrap="square" tIns="45700">
-            <a:normAutofit fontScale="62500" lnSpcReduction="10000"/>
+            <a:normAutofit fontScale="77500" lnSpcReduction="20000"/>
           </a:bodyPr>
           <a:lstStyle/>
           <a:p>
-            <a:pPr indent="0" lvl="0" marL="0" rtl="0" algn="l">
-              <a:lnSpc>
-                <a:spcPct val="115000"/>
-              </a:lnSpc>
-              <a:spcBef>
-                <a:spcPts val="800"/>
-              </a:spcBef>
-              <a:spcAft>
-                <a:spcPts val="0"/>
-              </a:spcAft>
-              <a:buSzPct val="34375"/>
-              <a:buNone/>
+            <a:pPr indent="-317182" lvl="0" marL="457200" rtl="0" algn="l">
+              <a:lnSpc>
+                <a:spcPct val="150000"/>
+              </a:lnSpc>
+              <a:spcBef>
+                <a:spcPts val="0"/>
+              </a:spcBef>
+              <a:spcAft>
+                <a:spcPts val="0"/>
+              </a:spcAft>
+              <a:buSzPct val="64285"/>
+              <a:buChar char="●"/>
             </a:pPr>
             <a:r>
-              <a:rPr lang="en-US" sz="3200"/>
-              <a:t>Thank you for joining us on this exciting journey! Code Crunch is redefining tech education and fostering inclusivity in technology. Let’s collaborate, innovate, and create a brighter future together.</a:t>
+              <a:rPr lang="en-US"/>
+              <a:t>Task:</a:t>
             </a:r>
-            <a:endParaRPr sz="3200"/>
+            <a:endParaRPr/>
           </a:p>
           <a:p>
-            <a:pPr indent="0" lvl="0" marL="0" rtl="0" algn="l">
-              <a:lnSpc>
-                <a:spcPct val="115000"/>
-              </a:lnSpc>
-              <a:spcBef>
-                <a:spcPts val="800"/>
-              </a:spcBef>
-              <a:spcAft>
-                <a:spcPts val="0"/>
-              </a:spcAft>
-              <a:buSzPct val="34375"/>
-              <a:buNone/>
+            <a:pPr indent="-317181" lvl="1" marL="914400" rtl="0" algn="l">
+              <a:lnSpc>
+                <a:spcPct val="150000"/>
+              </a:lnSpc>
+              <a:spcBef>
+                <a:spcPts val="0"/>
+              </a:spcBef>
+              <a:spcAft>
+                <a:spcPts val="0"/>
+              </a:spcAft>
+              <a:buSzPct val="74999"/>
+              <a:buChar char="•"/>
             </a:pPr>
             <a:r>
-              <a:t/>
+              <a:rPr lang="en-US"/>
+              <a:t>create an AI model using the following datasets:</a:t>
             </a:r>
-            <a:endParaRPr sz="3200"/>
+            <a:endParaRPr/>
           </a:p>
           <a:p>
-            <a:pPr indent="0" lvl="0" marL="0" rtl="0" algn="l">
-              <a:lnSpc>
-                <a:spcPct val="115000"/>
-              </a:lnSpc>
-              <a:spcBef>
-                <a:spcPts val="800"/>
-              </a:spcBef>
-              <a:spcAft>
-                <a:spcPts val="0"/>
-              </a:spcAft>
-              <a:buSzPct val="34375"/>
-              <a:buNone/>
+            <a:pPr indent="-317182" lvl="2" marL="1371600" rtl="0" algn="l">
+              <a:lnSpc>
+                <a:spcPct val="150000"/>
+              </a:lnSpc>
+              <a:spcBef>
+                <a:spcPts val="0"/>
+              </a:spcBef>
+              <a:spcAft>
+                <a:spcPts val="0"/>
+              </a:spcAft>
+              <a:buSzPct val="90000"/>
+              <a:buChar char="•"/>
             </a:pPr>
             <a:r>
-              <a:rPr lang="en-US" sz="3200"/>
-              <a:t>RSVP for sessions today. Follow us on social media. Spread the word about Code Crunch!</a:t>
+              <a:rPr lang="en-US"/>
+              <a:t>Spotify Songs Dataset (Provided)</a:t>
             </a:r>
-            <a:endParaRPr sz="3200"/>
+            <a:endParaRPr/>
           </a:p>
           <a:p>
-            <a:pPr indent="0" lvl="0" marL="0" rtl="0" algn="l">
-              <a:lnSpc>
-                <a:spcPct val="115000"/>
-              </a:lnSpc>
-              <a:spcBef>
-                <a:spcPts val="800"/>
-              </a:spcBef>
-              <a:spcAft>
-                <a:spcPts val="0"/>
-              </a:spcAft>
-              <a:buSzPct val="34375"/>
-              <a:buNone/>
+            <a:pPr indent="-317182" lvl="2" marL="1371600" rtl="0" algn="l">
+              <a:lnSpc>
+                <a:spcPct val="150000"/>
+              </a:lnSpc>
+              <a:spcBef>
+                <a:spcPts val="0"/>
+              </a:spcBef>
+              <a:spcAft>
+                <a:spcPts val="0"/>
+              </a:spcAft>
+              <a:buSzPct val="90000"/>
+              <a:buChar char="•"/>
             </a:pPr>
             <a:r>
-              <a:t/>
+              <a:rPr lang="en-US"/>
+              <a:t>A Dataset of your choosing (You Choose)</a:t>
             </a:r>
-            <a:endParaRPr sz="3200"/>
+            <a:endParaRPr/>
           </a:p>
           <a:p>
-            <a:pPr indent="0" lvl="0" marL="0" rtl="0" algn="l">
-              <a:lnSpc>
-                <a:spcPct val="115000"/>
-              </a:lnSpc>
-              <a:spcBef>
-                <a:spcPts val="800"/>
-              </a:spcBef>
-              <a:spcAft>
-                <a:spcPts val="0"/>
-              </a:spcAft>
-              <a:buSzPct val="34375"/>
-              <a:buNone/>
+            <a:pPr indent="-317182" lvl="0" marL="457200" rtl="0" algn="l">
+              <a:lnSpc>
+                <a:spcPct val="150000"/>
+              </a:lnSpc>
+              <a:spcBef>
+                <a:spcPts val="0"/>
+              </a:spcBef>
+              <a:spcAft>
+                <a:spcPts val="0"/>
+              </a:spcAft>
+              <a:buSzPct val="64285"/>
+              <a:buChar char="●"/>
             </a:pPr>
             <a:r>
-              <a:rPr lang="en-US" sz="3200"/>
-              <a:t>#CodeCrunch #CodeCrunchFIU #DiversityInTech #InclusiveTech #LeadershipOpportunities #FIUTechCommunity #WomenInSTEM #LGBTQInTech #LatinxInTech #BlackInTech #AAPIsInTech #TechLeadership #JoinOurTeam #FIUInnovation #TechForEveryone #EmpowerTech #FutureLeaders #HackerCulture #CodeYourFuture #TechDiversity #FIUPanthers #STEMOpportunities #BuildYourFuture #LeadWithCode #PanthersInTech</a:t>
+              <a:rPr lang="en-US"/>
+              <a:t>Goal:</a:t>
             </a:r>
+            <a:endParaRPr/>
+          </a:p>
+          <a:p>
+            <a:pPr indent="-317182" lvl="1" marL="914400" rtl="0" algn="l">
+              <a:lnSpc>
+                <a:spcPct val="150000"/>
+              </a:lnSpc>
+              <a:spcBef>
+                <a:spcPts val="0"/>
+              </a:spcBef>
+              <a:spcAft>
+                <a:spcPts val="0"/>
+              </a:spcAft>
+              <a:buSzPct val="75000"/>
+              <a:buChar char="•"/>
+            </a:pPr>
             <a:r>
               <a:rPr lang="en-US"/>
-              <a:t> </a:t>
+              <a:t>construct a model of your choosing (Classification, Regression, etc…), using the algorithm of your choosing (linear regression, KNN, CNN).</a:t>
+            </a:r>
+            <a:endParaRPr/>
+          </a:p>
+          <a:p>
+            <a:pPr indent="-317182" lvl="2" marL="1371600" rtl="0" algn="l">
+              <a:lnSpc>
+                <a:spcPct val="150000"/>
+              </a:lnSpc>
+              <a:spcBef>
+                <a:spcPts val="0"/>
+              </a:spcBef>
+              <a:spcAft>
+                <a:spcPts val="0"/>
+              </a:spcAft>
+              <a:buSzPct val="90000"/>
+              <a:buChar char="•"/>
+            </a:pPr>
+            <a:r>
+              <a:rPr lang="en-US"/>
+              <a:t>The best model will be evaluated based on the difficulty of the task given to the model, and the performance of the model</a:t>
+            </a:r>
+            <a:endParaRPr/>
+          </a:p>
+          <a:p>
+            <a:pPr indent="-317182" lvl="3" marL="1828800" rtl="0" algn="l">
+              <a:lnSpc>
+                <a:spcPct val="150000"/>
+              </a:lnSpc>
+              <a:spcBef>
+                <a:spcPts val="0"/>
+              </a:spcBef>
+              <a:spcAft>
+                <a:spcPts val="0"/>
+              </a:spcAft>
+              <a:buSzPct val="100000"/>
+              <a:buChar char="•"/>
+            </a:pPr>
+            <a:r>
+              <a:rPr lang="en-US"/>
+              <a:t>i.e, </a:t>
+            </a:r>
+            <a:endParaRPr/>
+          </a:p>
+          <a:p>
+            <a:pPr indent="-317182" lvl="4" marL="2286000" rtl="0" algn="l">
+              <a:lnSpc>
+                <a:spcPct val="150000"/>
+              </a:lnSpc>
+              <a:spcBef>
+                <a:spcPts val="0"/>
+              </a:spcBef>
+              <a:spcAft>
+                <a:spcPts val="0"/>
+              </a:spcAft>
+              <a:buSzPct val="100000"/>
+              <a:buChar char="•"/>
+            </a:pPr>
+            <a:r>
+              <a:rPr lang="en-US"/>
+              <a:t>classification - number of classes</a:t>
+            </a:r>
+            <a:endParaRPr/>
+          </a:p>
+          <a:p>
+            <a:pPr indent="-317182" lvl="4" marL="2286000" rtl="0" algn="l">
+              <a:lnSpc>
+                <a:spcPct val="150000"/>
+              </a:lnSpc>
+              <a:spcBef>
+                <a:spcPts val="0"/>
+              </a:spcBef>
+              <a:spcAft>
+                <a:spcPts val="0"/>
+              </a:spcAft>
+              <a:buSzPct val="100000"/>
+              <a:buChar char="•"/>
+            </a:pPr>
+            <a:r>
+              <a:rPr lang="en-US"/>
+              <a:t>regression - data pattern (linear, polynomial, non-linear)</a:t>
             </a:r>
             <a:endParaRPr/>
           </a:p>
@@ -28657,7 +28942,7 @@
       </p:sp>
       <p:pic>
         <p:nvPicPr>
-          <p:cNvPr id="256" name="Google Shape;256;g2d75afc7928_0_76"/>
+          <p:cNvPr id="257" name="Google Shape;257;g325cb273146_0_2"/>
           <p:cNvPicPr preferRelativeResize="0"/>
           <p:nvPr/>
         </p:nvPicPr>
@@ -28670,7 +28955,7 @@
         </p:blipFill>
         <p:spPr>
           <a:xfrm>
-            <a:off x="10173375" y="0"/>
+            <a:off x="10176075" y="-237200"/>
             <a:ext cx="2015925" cy="2015925"/>
           </a:xfrm>
           <a:prstGeom prst="rect">
@@ -28702,7 +28987,7 @@
     </p:bg>
     <p:spTree>
       <p:nvGrpSpPr>
-        <p:cNvPr id="260" name="Shape 260"/>
+        <p:cNvPr id="261" name="Shape 261"/>
         <p:cNvGrpSpPr/>
         <p:nvPr/>
       </p:nvGrpSpPr>
@@ -28716,7 +29001,7 @@
       </p:grpSpPr>
       <p:sp>
         <p:nvSpPr>
-          <p:cNvPr id="261" name="Google Shape;261;g2d5b2b5e3c8_0_148"/>
+          <p:cNvPr id="262" name="Google Shape;262;g2d75afc7928_0_76"/>
           <p:cNvSpPr/>
           <p:nvPr/>
         </p:nvSpPr>
@@ -28775,16 +29060,16 @@
       </p:sp>
       <p:sp>
         <p:nvSpPr>
-          <p:cNvPr id="262" name="Google Shape;262;g2d5b2b5e3c8_0_148"/>
+          <p:cNvPr id="263" name="Google Shape;263;g2d75afc7928_0_76"/>
           <p:cNvSpPr txBox="1"/>
           <p:nvPr>
-            <p:ph idx="4294967295" type="title"/>
+            <p:ph type="title"/>
           </p:nvPr>
         </p:nvSpPr>
         <p:spPr>
           <a:xfrm>
-            <a:off x="4024800" y="2567800"/>
-            <a:ext cx="4142400" cy="861300"/>
+            <a:off x="572493" y="238539"/>
+            <a:ext cx="11018400" cy="1434300"/>
           </a:xfrm>
           <a:prstGeom prst="rect">
             <a:avLst/>
@@ -28818,8 +29103,596 @@
               <a:buNone/>
             </a:pPr>
             <a:r>
-              <a:rPr lang="en-US" sz="5500"/>
-              <a:t>Q&amp;A Session</a:t>
+              <a:rPr lang="en-US">
+                <a:latin typeface="Calibri"/>
+                <a:ea typeface="Calibri"/>
+                <a:cs typeface="Calibri"/>
+                <a:sym typeface="Calibri"/>
+              </a:rPr>
+              <a:t>Let’s Innovate Together!</a:t>
+            </a:r>
+            <a:endParaRPr/>
+          </a:p>
+        </p:txBody>
+      </p:sp>
+      <p:sp>
+        <p:nvSpPr>
+          <p:cNvPr id="264" name="Google Shape;264;g2d75afc7928_0_76"/>
+          <p:cNvSpPr/>
+          <p:nvPr/>
+        </p:nvSpPr>
+        <p:spPr>
+          <a:xfrm>
+            <a:off x="572493" y="1681544"/>
+            <a:ext cx="10972800" cy="18288"/>
+          </a:xfrm>
+          <a:custGeom>
+            <a:rect b="b" l="l" r="r" t="t"/>
+            <a:pathLst>
+              <a:path extrusionOk="0" fill="none" h="18288" w="10972800">
+                <a:moveTo>
+                  <a:pt x="0" y="0"/>
+                </a:moveTo>
+                <a:cubicBezTo>
+                  <a:pt x="165916" y="-1866"/>
+                  <a:pt x="188720" y="13756"/>
+                  <a:pt x="356616" y="0"/>
+                </a:cubicBezTo>
+                <a:cubicBezTo>
+                  <a:pt x="524512" y="-13756"/>
+                  <a:pt x="734781" y="8922"/>
+                  <a:pt x="1042416" y="0"/>
+                </a:cubicBezTo>
+                <a:cubicBezTo>
+                  <a:pt x="1350051" y="-8922"/>
+                  <a:pt x="1595982" y="-26315"/>
+                  <a:pt x="1947672" y="0"/>
+                </a:cubicBezTo>
+                <a:cubicBezTo>
+                  <a:pt x="2299362" y="26315"/>
+                  <a:pt x="2292691" y="-19526"/>
+                  <a:pt x="2633472" y="0"/>
+                </a:cubicBezTo>
+                <a:cubicBezTo>
+                  <a:pt x="2974253" y="19526"/>
+                  <a:pt x="2857309" y="10773"/>
+                  <a:pt x="2990088" y="0"/>
+                </a:cubicBezTo>
+                <a:cubicBezTo>
+                  <a:pt x="3122867" y="-10773"/>
+                  <a:pt x="3359343" y="7194"/>
+                  <a:pt x="3456432" y="0"/>
+                </a:cubicBezTo>
+                <a:cubicBezTo>
+                  <a:pt x="3553521" y="-7194"/>
+                  <a:pt x="4136258" y="5108"/>
+                  <a:pt x="4361688" y="0"/>
+                </a:cubicBezTo>
+                <a:cubicBezTo>
+                  <a:pt x="4587118" y="-5108"/>
+                  <a:pt x="4992424" y="-42958"/>
+                  <a:pt x="5266944" y="0"/>
+                </a:cubicBezTo>
+                <a:cubicBezTo>
+                  <a:pt x="5541464" y="42958"/>
+                  <a:pt x="5882966" y="-3430"/>
+                  <a:pt x="6172200" y="0"/>
+                </a:cubicBezTo>
+                <a:cubicBezTo>
+                  <a:pt x="6461434" y="3430"/>
+                  <a:pt x="6432127" y="6688"/>
+                  <a:pt x="6528816" y="0"/>
+                </a:cubicBezTo>
+                <a:cubicBezTo>
+                  <a:pt x="6625505" y="-6688"/>
+                  <a:pt x="6916805" y="-436"/>
+                  <a:pt x="7214616" y="0"/>
+                </a:cubicBezTo>
+                <a:cubicBezTo>
+                  <a:pt x="7512427" y="436"/>
+                  <a:pt x="7626159" y="-6909"/>
+                  <a:pt x="7790688" y="0"/>
+                </a:cubicBezTo>
+                <a:cubicBezTo>
+                  <a:pt x="7955217" y="6909"/>
+                  <a:pt x="8048891" y="15307"/>
+                  <a:pt x="8147304" y="0"/>
+                </a:cubicBezTo>
+                <a:cubicBezTo>
+                  <a:pt x="8245717" y="-15307"/>
+                  <a:pt x="8645618" y="-11734"/>
+                  <a:pt x="9052560" y="0"/>
+                </a:cubicBezTo>
+                <a:cubicBezTo>
+                  <a:pt x="9459502" y="11734"/>
+                  <a:pt x="9320584" y="8388"/>
+                  <a:pt x="9409176" y="0"/>
+                </a:cubicBezTo>
+                <a:cubicBezTo>
+                  <a:pt x="9497768" y="-8388"/>
+                  <a:pt x="9644192" y="8379"/>
+                  <a:pt x="9765792" y="0"/>
+                </a:cubicBezTo>
+                <a:cubicBezTo>
+                  <a:pt x="9887392" y="-8379"/>
+                  <a:pt x="10105220" y="-12663"/>
+                  <a:pt x="10341864" y="0"/>
+                </a:cubicBezTo>
+                <a:cubicBezTo>
+                  <a:pt x="10578508" y="12663"/>
+                  <a:pt x="10773103" y="-5786"/>
+                  <a:pt x="10972800" y="0"/>
+                </a:cubicBezTo>
+                <a:cubicBezTo>
+                  <a:pt x="10972146" y="8818"/>
+                  <a:pt x="10972240" y="13823"/>
+                  <a:pt x="10972800" y="18288"/>
+                </a:cubicBezTo>
+                <a:cubicBezTo>
+                  <a:pt x="10588778" y="31598"/>
+                  <a:pt x="10543381" y="-12698"/>
+                  <a:pt x="10177272" y="18288"/>
+                </a:cubicBezTo>
+                <a:cubicBezTo>
+                  <a:pt x="9811163" y="49274"/>
+                  <a:pt x="9996817" y="25662"/>
+                  <a:pt x="9820656" y="18288"/>
+                </a:cubicBezTo>
+                <a:cubicBezTo>
+                  <a:pt x="9644495" y="10914"/>
+                  <a:pt x="9607007" y="31631"/>
+                  <a:pt x="9464040" y="18288"/>
+                </a:cubicBezTo>
+                <a:cubicBezTo>
+                  <a:pt x="9321073" y="4945"/>
+                  <a:pt x="9114189" y="28940"/>
+                  <a:pt x="8778240" y="18288"/>
+                </a:cubicBezTo>
+                <a:cubicBezTo>
+                  <a:pt x="8442291" y="7636"/>
+                  <a:pt x="8594763" y="987"/>
+                  <a:pt x="8421624" y="18288"/>
+                </a:cubicBezTo>
+                <a:cubicBezTo>
+                  <a:pt x="8248485" y="35589"/>
+                  <a:pt x="7929515" y="37573"/>
+                  <a:pt x="7735824" y="18288"/>
+                </a:cubicBezTo>
+                <a:cubicBezTo>
+                  <a:pt x="7542133" y="-997"/>
+                  <a:pt x="7252504" y="33858"/>
+                  <a:pt x="6940296" y="18288"/>
+                </a:cubicBezTo>
+                <a:cubicBezTo>
+                  <a:pt x="6628088" y="2718"/>
+                  <a:pt x="6528503" y="48389"/>
+                  <a:pt x="6254496" y="18288"/>
+                </a:cubicBezTo>
+                <a:cubicBezTo>
+                  <a:pt x="5980489" y="-11813"/>
+                  <a:pt x="5695784" y="-3740"/>
+                  <a:pt x="5458968" y="18288"/>
+                </a:cubicBezTo>
+                <a:cubicBezTo>
+                  <a:pt x="5222152" y="40316"/>
+                  <a:pt x="5010751" y="19095"/>
+                  <a:pt x="4663440" y="18288"/>
+                </a:cubicBezTo>
+                <a:cubicBezTo>
+                  <a:pt x="4316129" y="17481"/>
+                  <a:pt x="4425552" y="1606"/>
+                  <a:pt x="4306824" y="18288"/>
+                </a:cubicBezTo>
+                <a:cubicBezTo>
+                  <a:pt x="4188096" y="34970"/>
+                  <a:pt x="3941535" y="7481"/>
+                  <a:pt x="3840480" y="18288"/>
+                </a:cubicBezTo>
+                <a:cubicBezTo>
+                  <a:pt x="3739425" y="29095"/>
+                  <a:pt x="3402388" y="17641"/>
+                  <a:pt x="3264408" y="18288"/>
+                </a:cubicBezTo>
+                <a:cubicBezTo>
+                  <a:pt x="3126428" y="18935"/>
+                  <a:pt x="2776779" y="9983"/>
+                  <a:pt x="2578608" y="18288"/>
+                </a:cubicBezTo>
+                <a:cubicBezTo>
+                  <a:pt x="2380437" y="26593"/>
+                  <a:pt x="1909468" y="25818"/>
+                  <a:pt x="1673352" y="18288"/>
+                </a:cubicBezTo>
+                <a:cubicBezTo>
+                  <a:pt x="1437236" y="10758"/>
+                  <a:pt x="1131180" y="49884"/>
+                  <a:pt x="877824" y="18288"/>
+                </a:cubicBezTo>
+                <a:cubicBezTo>
+                  <a:pt x="624468" y="-13308"/>
+                  <a:pt x="206753" y="2195"/>
+                  <a:pt x="0" y="18288"/>
+                </a:cubicBezTo>
+                <a:cubicBezTo>
+                  <a:pt x="313" y="10654"/>
+                  <a:pt x="-263" y="4056"/>
+                  <a:pt x="0" y="0"/>
+                </a:cubicBezTo>
+                <a:close/>
+              </a:path>
+              <a:path extrusionOk="0" h="18288" w="10972800">
+                <a:moveTo>
+                  <a:pt x="0" y="0"/>
+                </a:moveTo>
+                <a:cubicBezTo>
+                  <a:pt x="164017" y="-17675"/>
+                  <a:pt x="309425" y="9913"/>
+                  <a:pt x="466344" y="0"/>
+                </a:cubicBezTo>
+                <a:cubicBezTo>
+                  <a:pt x="623263" y="-9913"/>
+                  <a:pt x="659300" y="-14524"/>
+                  <a:pt x="822960" y="0"/>
+                </a:cubicBezTo>
+                <a:cubicBezTo>
+                  <a:pt x="986620" y="14524"/>
+                  <a:pt x="1105222" y="-16481"/>
+                  <a:pt x="1289304" y="0"/>
+                </a:cubicBezTo>
+                <a:cubicBezTo>
+                  <a:pt x="1473386" y="16481"/>
+                  <a:pt x="1693223" y="26161"/>
+                  <a:pt x="1975104" y="0"/>
+                </a:cubicBezTo>
+                <a:cubicBezTo>
+                  <a:pt x="2256985" y="-26161"/>
+                  <a:pt x="2435781" y="23061"/>
+                  <a:pt x="2770632" y="0"/>
+                </a:cubicBezTo>
+                <a:cubicBezTo>
+                  <a:pt x="3105483" y="-23061"/>
+                  <a:pt x="3247479" y="-44011"/>
+                  <a:pt x="3675888" y="0"/>
+                </a:cubicBezTo>
+                <a:cubicBezTo>
+                  <a:pt x="4104297" y="44011"/>
+                  <a:pt x="4280918" y="4017"/>
+                  <a:pt x="4581144" y="0"/>
+                </a:cubicBezTo>
+                <a:cubicBezTo>
+                  <a:pt x="4881370" y="-4017"/>
+                  <a:pt x="5021699" y="-11889"/>
+                  <a:pt x="5157216" y="0"/>
+                </a:cubicBezTo>
+                <a:cubicBezTo>
+                  <a:pt x="5292733" y="11889"/>
+                  <a:pt x="5603398" y="-17698"/>
+                  <a:pt x="5952744" y="0"/>
+                </a:cubicBezTo>
+                <a:cubicBezTo>
+                  <a:pt x="6302090" y="17698"/>
+                  <a:pt x="6353093" y="-11909"/>
+                  <a:pt x="6638544" y="0"/>
+                </a:cubicBezTo>
+                <a:cubicBezTo>
+                  <a:pt x="6923995" y="11909"/>
+                  <a:pt x="7053404" y="21630"/>
+                  <a:pt x="7214616" y="0"/>
+                </a:cubicBezTo>
+                <a:cubicBezTo>
+                  <a:pt x="7375828" y="-21630"/>
+                  <a:pt x="7837963" y="3886"/>
+                  <a:pt x="8010144" y="0"/>
+                </a:cubicBezTo>
+                <a:cubicBezTo>
+                  <a:pt x="8182325" y="-3886"/>
+                  <a:pt x="8224183" y="16009"/>
+                  <a:pt x="8366760" y="0"/>
+                </a:cubicBezTo>
+                <a:cubicBezTo>
+                  <a:pt x="8509337" y="-16009"/>
+                  <a:pt x="8687920" y="-5720"/>
+                  <a:pt x="8942832" y="0"/>
+                </a:cubicBezTo>
+                <a:cubicBezTo>
+                  <a:pt x="9197744" y="5720"/>
+                  <a:pt x="9368437" y="20479"/>
+                  <a:pt x="9628632" y="0"/>
+                </a:cubicBezTo>
+                <a:cubicBezTo>
+                  <a:pt x="9888827" y="-20479"/>
+                  <a:pt x="10560858" y="-20746"/>
+                  <a:pt x="10972800" y="0"/>
+                </a:cubicBezTo>
+                <a:cubicBezTo>
+                  <a:pt x="10972186" y="5722"/>
+                  <a:pt x="10972980" y="12495"/>
+                  <a:pt x="10972800" y="18288"/>
+                </a:cubicBezTo>
+                <a:cubicBezTo>
+                  <a:pt x="10786146" y="12536"/>
+                  <a:pt x="10623717" y="14033"/>
+                  <a:pt x="10506456" y="18288"/>
+                </a:cubicBezTo>
+                <a:cubicBezTo>
+                  <a:pt x="10389195" y="22543"/>
+                  <a:pt x="10296178" y="20107"/>
+                  <a:pt x="10149840" y="18288"/>
+                </a:cubicBezTo>
+                <a:cubicBezTo>
+                  <a:pt x="10003502" y="16469"/>
+                  <a:pt x="9767530" y="28891"/>
+                  <a:pt x="9464040" y="18288"/>
+                </a:cubicBezTo>
+                <a:cubicBezTo>
+                  <a:pt x="9160550" y="7685"/>
+                  <a:pt x="9229050" y="2659"/>
+                  <a:pt x="8997696" y="18288"/>
+                </a:cubicBezTo>
+                <a:cubicBezTo>
+                  <a:pt x="8766342" y="33917"/>
+                  <a:pt x="8340136" y="34864"/>
+                  <a:pt x="8092440" y="18288"/>
+                </a:cubicBezTo>
+                <a:cubicBezTo>
+                  <a:pt x="7844744" y="1712"/>
+                  <a:pt x="7863720" y="27405"/>
+                  <a:pt x="7735824" y="18288"/>
+                </a:cubicBezTo>
+                <a:cubicBezTo>
+                  <a:pt x="7607928" y="9171"/>
+                  <a:pt x="7323619" y="461"/>
+                  <a:pt x="7050024" y="18288"/>
+                </a:cubicBezTo>
+                <a:cubicBezTo>
+                  <a:pt x="6776429" y="36115"/>
+                  <a:pt x="6787899" y="28206"/>
+                  <a:pt x="6693408" y="18288"/>
+                </a:cubicBezTo>
+                <a:cubicBezTo>
+                  <a:pt x="6598917" y="8370"/>
+                  <a:pt x="6395231" y="19114"/>
+                  <a:pt x="6227064" y="18288"/>
+                </a:cubicBezTo>
+                <a:cubicBezTo>
+                  <a:pt x="6058897" y="17462"/>
+                  <a:pt x="5618582" y="1091"/>
+                  <a:pt x="5431536" y="18288"/>
+                </a:cubicBezTo>
+                <a:cubicBezTo>
+                  <a:pt x="5244490" y="35485"/>
+                  <a:pt x="4729797" y="-9650"/>
+                  <a:pt x="4526280" y="18288"/>
+                </a:cubicBezTo>
+                <a:cubicBezTo>
+                  <a:pt x="4322763" y="46226"/>
+                  <a:pt x="4216797" y="756"/>
+                  <a:pt x="4059936" y="18288"/>
+                </a:cubicBezTo>
+                <a:cubicBezTo>
+                  <a:pt x="3903075" y="35820"/>
+                  <a:pt x="3537912" y="42098"/>
+                  <a:pt x="3374136" y="18288"/>
+                </a:cubicBezTo>
+                <a:cubicBezTo>
+                  <a:pt x="3210360" y="-5522"/>
+                  <a:pt x="3126842" y="39135"/>
+                  <a:pt x="2907792" y="18288"/>
+                </a:cubicBezTo>
+                <a:cubicBezTo>
+                  <a:pt x="2688742" y="-2559"/>
+                  <a:pt x="2490436" y="34100"/>
+                  <a:pt x="2112264" y="18288"/>
+                </a:cubicBezTo>
+                <a:cubicBezTo>
+                  <a:pt x="1734092" y="2476"/>
+                  <a:pt x="1744622" y="-7274"/>
+                  <a:pt x="1536192" y="18288"/>
+                </a:cubicBezTo>
+                <a:cubicBezTo>
+                  <a:pt x="1327762" y="43850"/>
+                  <a:pt x="1189025" y="6435"/>
+                  <a:pt x="1069848" y="18288"/>
+                </a:cubicBezTo>
+                <a:cubicBezTo>
+                  <a:pt x="950671" y="30141"/>
+                  <a:pt x="858345" y="33684"/>
+                  <a:pt x="713232" y="18288"/>
+                </a:cubicBezTo>
+                <a:cubicBezTo>
+                  <a:pt x="568119" y="2892"/>
+                  <a:pt x="250292" y="5410"/>
+                  <a:pt x="0" y="18288"/>
+                </a:cubicBezTo>
+                <a:cubicBezTo>
+                  <a:pt x="465" y="13062"/>
+                  <a:pt x="-894" y="9029"/>
+                  <a:pt x="0" y="0"/>
+                </a:cubicBezTo>
+                <a:close/>
+              </a:path>
+            </a:pathLst>
+          </a:custGeom>
+          <a:solidFill>
+            <a:schemeClr val="accent2">
+              <a:alpha val="73725"/>
+            </a:schemeClr>
+          </a:solidFill>
+          <a:ln cap="rnd" cmpd="sng" w="44450">
+            <a:solidFill>
+              <a:schemeClr val="accent2">
+                <a:alpha val="73725"/>
+              </a:schemeClr>
+            </a:solidFill>
+            <a:prstDash val="solid"/>
+            <a:round/>
+            <a:headEnd len="sm" w="sm" type="none"/>
+            <a:tailEnd len="sm" w="sm" type="none"/>
+          </a:ln>
+        </p:spPr>
+        <p:txBody>
+          <a:bodyPr anchorCtr="0" anchor="ctr" bIns="45700" lIns="91425" spcFirstLastPara="1" rIns="91425" wrap="square" tIns="45700">
+            <a:noAutofit/>
+          </a:bodyPr>
+          <a:lstStyle/>
+          <a:p>
+            <a:pPr indent="0" lvl="0" marL="0" marR="0" rtl="0" algn="ctr">
+              <a:lnSpc>
+                <a:spcPct val="100000"/>
+              </a:lnSpc>
+              <a:spcBef>
+                <a:spcPts val="0"/>
+              </a:spcBef>
+              <a:spcAft>
+                <a:spcPts val="0"/>
+              </a:spcAft>
+              <a:buClr>
+                <a:srgbClr val="000000"/>
+              </a:buClr>
+              <a:buSzPts val="1900"/>
+              <a:buFont typeface="Arial"/>
+              <a:buNone/>
+            </a:pPr>
+            <a:r>
+              <a:t/>
+            </a:r>
+            <a:endParaRPr b="0" i="0" sz="1900" u="none" cap="none" strike="noStrike">
+              <a:solidFill>
+                <a:schemeClr val="lt1"/>
+              </a:solidFill>
+              <a:latin typeface="Arial"/>
+              <a:ea typeface="Arial"/>
+              <a:cs typeface="Arial"/>
+              <a:sym typeface="Arial"/>
+            </a:endParaRPr>
+          </a:p>
+        </p:txBody>
+      </p:sp>
+      <p:sp>
+        <p:nvSpPr>
+          <p:cNvPr id="265" name="Google Shape;265;g2d75afc7928_0_76"/>
+          <p:cNvSpPr txBox="1"/>
+          <p:nvPr>
+            <p:ph idx="1" type="body"/>
+          </p:nvPr>
+        </p:nvSpPr>
+        <p:spPr>
+          <a:xfrm>
+            <a:off x="572500" y="2071300"/>
+            <a:ext cx="10922400" cy="4119300"/>
+          </a:xfrm>
+          <a:prstGeom prst="rect">
+            <a:avLst/>
+          </a:prstGeom>
+          <a:noFill/>
+          <a:ln>
+            <a:noFill/>
+          </a:ln>
+        </p:spPr>
+        <p:txBody>
+          <a:bodyPr anchorCtr="0" anchor="t" bIns="45700" lIns="91425" spcFirstLastPara="1" rIns="91425" wrap="square" tIns="45700">
+            <a:normAutofit fontScale="62500" lnSpcReduction="10000"/>
+          </a:bodyPr>
+          <a:lstStyle/>
+          <a:p>
+            <a:pPr indent="0" lvl="0" marL="0" rtl="0" algn="l">
+              <a:lnSpc>
+                <a:spcPct val="115000"/>
+              </a:lnSpc>
+              <a:spcBef>
+                <a:spcPts val="800"/>
+              </a:spcBef>
+              <a:spcAft>
+                <a:spcPts val="0"/>
+              </a:spcAft>
+              <a:buSzPct val="34375"/>
+              <a:buNone/>
+            </a:pPr>
+            <a:r>
+              <a:rPr lang="en-US" sz="3200"/>
+              <a:t>Thank you for joining us on this exciting journey! Code Crunch is redefining tech education and fostering inclusivity in technology. Let’s collaborate, innovate, and create a brighter future together.</a:t>
+            </a:r>
+            <a:endParaRPr sz="3200"/>
+          </a:p>
+          <a:p>
+            <a:pPr indent="0" lvl="0" marL="0" rtl="0" algn="l">
+              <a:lnSpc>
+                <a:spcPct val="115000"/>
+              </a:lnSpc>
+              <a:spcBef>
+                <a:spcPts val="800"/>
+              </a:spcBef>
+              <a:spcAft>
+                <a:spcPts val="0"/>
+              </a:spcAft>
+              <a:buSzPct val="34375"/>
+              <a:buNone/>
+            </a:pPr>
+            <a:r>
+              <a:t/>
+            </a:r>
+            <a:endParaRPr sz="3200"/>
+          </a:p>
+          <a:p>
+            <a:pPr indent="0" lvl="0" marL="0" rtl="0" algn="l">
+              <a:lnSpc>
+                <a:spcPct val="115000"/>
+              </a:lnSpc>
+              <a:spcBef>
+                <a:spcPts val="800"/>
+              </a:spcBef>
+              <a:spcAft>
+                <a:spcPts val="0"/>
+              </a:spcAft>
+              <a:buSzPct val="34375"/>
+              <a:buNone/>
+            </a:pPr>
+            <a:r>
+              <a:rPr lang="en-US" sz="3200"/>
+              <a:t>RSVP for sessions today. Follow us on social media. Spread the word about Code Crunch!</a:t>
+            </a:r>
+            <a:endParaRPr sz="3200"/>
+          </a:p>
+          <a:p>
+            <a:pPr indent="0" lvl="0" marL="0" rtl="0" algn="l">
+              <a:lnSpc>
+                <a:spcPct val="115000"/>
+              </a:lnSpc>
+              <a:spcBef>
+                <a:spcPts val="800"/>
+              </a:spcBef>
+              <a:spcAft>
+                <a:spcPts val="0"/>
+              </a:spcAft>
+              <a:buSzPct val="34375"/>
+              <a:buNone/>
+            </a:pPr>
+            <a:r>
+              <a:t/>
+            </a:r>
+            <a:endParaRPr sz="3200"/>
+          </a:p>
+          <a:p>
+            <a:pPr indent="0" lvl="0" marL="0" rtl="0" algn="l">
+              <a:lnSpc>
+                <a:spcPct val="115000"/>
+              </a:lnSpc>
+              <a:spcBef>
+                <a:spcPts val="800"/>
+              </a:spcBef>
+              <a:spcAft>
+                <a:spcPts val="0"/>
+              </a:spcAft>
+              <a:buSzPct val="34375"/>
+              <a:buNone/>
+            </a:pPr>
+            <a:r>
+              <a:rPr lang="en-US" sz="3200"/>
+              <a:t>#CodeCrunch #CodeCrunchFIU #DiversityInTech #InclusiveTech #LeadershipOpportunities #FIUTechCommunity #WomenInSTEM #LGBTQInTech #LatinxInTech #BlackInTech #AAPIsInTech #TechLeadership #JoinOurTeam #FIUInnovation #TechForEveryone #EmpowerTech #FutureLeaders #HackerCulture #CodeYourFuture #TechDiversity #FIUPanthers #STEMOpportunities #BuildYourFuture #LeadWithCode #PanthersInTech</a:t>
+            </a:r>
+            <a:r>
+              <a:rPr lang="en-US"/>
+              <a:t> </a:t>
             </a:r>
             <a:endParaRPr/>
           </a:p>
@@ -28827,7 +29700,7 @@
       </p:sp>
       <p:pic>
         <p:nvPicPr>
-          <p:cNvPr id="263" name="Google Shape;263;g2d5b2b5e3c8_0_148"/>
+          <p:cNvPr id="266" name="Google Shape;266;g2d75afc7928_0_76"/>
           <p:cNvPicPr preferRelativeResize="0"/>
           <p:nvPr/>
         </p:nvPicPr>
@@ -28872,7 +29745,7 @@
     </p:bg>
     <p:spTree>
       <p:nvGrpSpPr>
-        <p:cNvPr id="268" name="Shape 268"/>
+        <p:cNvPr id="270" name="Shape 270"/>
         <p:cNvGrpSpPr/>
         <p:nvPr/>
       </p:nvGrpSpPr>
@@ -28886,7 +29759,177 @@
       </p:grpSpPr>
       <p:sp>
         <p:nvSpPr>
-          <p:cNvPr id="269" name="Google Shape;269;g32248793e7f_0_0"/>
+          <p:cNvPr id="271" name="Google Shape;271;g2d5b2b5e3c8_0_148"/>
+          <p:cNvSpPr/>
+          <p:nvPr/>
+        </p:nvSpPr>
+        <p:spPr>
+          <a:xfrm>
+            <a:off x="0" y="0"/>
+            <a:ext cx="12189300" cy="6858000"/>
+          </a:xfrm>
+          <a:prstGeom prst="rect">
+            <a:avLst/>
+          </a:prstGeom>
+          <a:solidFill>
+            <a:schemeClr val="lt1"/>
+          </a:solidFill>
+          <a:ln>
+            <a:noFill/>
+          </a:ln>
+        </p:spPr>
+        <p:txBody>
+          <a:bodyPr anchorCtr="0" anchor="ctr" bIns="45700" lIns="91425" spcFirstLastPara="1" rIns="91425" wrap="square" tIns="45700">
+            <a:noAutofit/>
+          </a:bodyPr>
+          <a:lstStyle/>
+          <a:p>
+            <a:pPr indent="0" lvl="0" marL="0" marR="0" rtl="0" algn="ctr">
+              <a:lnSpc>
+                <a:spcPct val="100000"/>
+              </a:lnSpc>
+              <a:spcBef>
+                <a:spcPts val="0"/>
+              </a:spcBef>
+              <a:spcAft>
+                <a:spcPts val="0"/>
+              </a:spcAft>
+              <a:buClr>
+                <a:srgbClr val="000000"/>
+              </a:buClr>
+              <a:buSzPts val="1900"/>
+              <a:buFont typeface="Arial"/>
+              <a:buNone/>
+            </a:pPr>
+            <a:r>
+              <a:t/>
+            </a:r>
+            <a:endParaRPr b="0" i="0" sz="1900" u="none" cap="none" strike="noStrike">
+              <a:solidFill>
+                <a:schemeClr val="lt1"/>
+              </a:solidFill>
+              <a:latin typeface="Arial"/>
+              <a:ea typeface="Arial"/>
+              <a:cs typeface="Arial"/>
+              <a:sym typeface="Arial"/>
+            </a:endParaRPr>
+          </a:p>
+        </p:txBody>
+      </p:sp>
+      <p:sp>
+        <p:nvSpPr>
+          <p:cNvPr id="272" name="Google Shape;272;g2d5b2b5e3c8_0_148"/>
+          <p:cNvSpPr txBox="1"/>
+          <p:nvPr>
+            <p:ph idx="4294967295" type="title"/>
+          </p:nvPr>
+        </p:nvSpPr>
+        <p:spPr>
+          <a:xfrm>
+            <a:off x="4024800" y="2567800"/>
+            <a:ext cx="4142400" cy="861300"/>
+          </a:xfrm>
+          <a:prstGeom prst="rect">
+            <a:avLst/>
+          </a:prstGeom>
+          <a:noFill/>
+          <a:ln>
+            <a:noFill/>
+          </a:ln>
+        </p:spPr>
+        <p:txBody>
+          <a:bodyPr anchorCtr="0" anchor="b" bIns="45700" lIns="91425" spcFirstLastPara="1" rIns="91425" wrap="square" tIns="45700">
+            <a:normAutofit/>
+          </a:bodyPr>
+          <a:lstStyle/>
+          <a:p>
+            <a:pPr indent="0" lvl="0" marL="0" rtl="0" algn="l">
+              <a:lnSpc>
+                <a:spcPct val="90000"/>
+              </a:lnSpc>
+              <a:spcBef>
+                <a:spcPts val="0"/>
+              </a:spcBef>
+              <a:spcAft>
+                <a:spcPts val="0"/>
+              </a:spcAft>
+              <a:buClr>
+                <a:schemeClr val="dk1"/>
+              </a:buClr>
+              <a:buSzPts val="5500"/>
+              <a:buFont typeface="Play"/>
+              <a:buNone/>
+            </a:pPr>
+            <a:r>
+              <a:rPr lang="en-US" sz="5500"/>
+              <a:t>Q&amp;A Session</a:t>
+            </a:r>
+            <a:endParaRPr/>
+          </a:p>
+        </p:txBody>
+      </p:sp>
+      <p:pic>
+        <p:nvPicPr>
+          <p:cNvPr id="273" name="Google Shape;273;g2d5b2b5e3c8_0_148"/>
+          <p:cNvPicPr preferRelativeResize="0"/>
+          <p:nvPr/>
+        </p:nvPicPr>
+        <p:blipFill rotWithShape="1">
+          <a:blip r:embed="rId3">
+            <a:alphaModFix/>
+          </a:blip>
+          <a:srcRect b="0" l="0" r="0" t="0"/>
+          <a:stretch/>
+        </p:blipFill>
+        <p:spPr>
+          <a:xfrm>
+            <a:off x="10173375" y="0"/>
+            <a:ext cx="2015925" cy="2015925"/>
+          </a:xfrm>
+          <a:prstGeom prst="rect">
+            <a:avLst/>
+          </a:prstGeom>
+          <a:noFill/>
+          <a:ln>
+            <a:noFill/>
+          </a:ln>
+        </p:spPr>
+      </p:pic>
+    </p:spTree>
+  </p:cSld>
+  <p:clrMapOvr>
+    <a:masterClrMapping/>
+  </p:clrMapOvr>
+</p:sld>
+</file>
+
+<file path=ppt/slides/slide15.xml><?xml version="1.0" encoding="utf-8"?>
+<p:sld xmlns:a="http://schemas.openxmlformats.org/drawingml/2006/main" xmlns:r="http://schemas.openxmlformats.org/officeDocument/2006/relationships" xmlns:mc="http://schemas.openxmlformats.org/markup-compatibility/2006" xmlns:mv="urn:schemas-microsoft-com:mac:vml" xmlns:p="http://schemas.openxmlformats.org/presentationml/2006/main" xmlns:c="http://schemas.openxmlformats.org/drawingml/2006/chart" xmlns:dgm="http://schemas.openxmlformats.org/drawingml/2006/diagram" xmlns:o="urn:schemas-microsoft-com:office:office" xmlns:v="urn:schemas-microsoft-com:vml" xmlns:pvml="urn:schemas-microsoft-com:office:powerpoint" xmlns:com="http://schemas.openxmlformats.org/drawingml/2006/compatibility" xmlns:p14="http://schemas.microsoft.com/office/powerpoint/2010/main" xmlns:p15="http://schemas.microsoft.com/office/powerpoint/2012/main" xmlns:ahyp="http://schemas.microsoft.com/office/drawing/2018/hyperlinkcolor">
+  <p:cSld>
+    <p:bg>
+      <p:bgPr>
+        <a:solidFill>
+          <a:schemeClr val="lt1"/>
+        </a:solidFill>
+      </p:bgPr>
+    </p:bg>
+    <p:spTree>
+      <p:nvGrpSpPr>
+        <p:cNvPr id="278" name="Shape 278"/>
+        <p:cNvGrpSpPr/>
+        <p:nvPr/>
+      </p:nvGrpSpPr>
+      <p:grpSpPr>
+        <a:xfrm>
+          <a:off x="0" y="0"/>
+          <a:ext cx="0" cy="0"/>
+          <a:chOff x="0" y="0"/>
+          <a:chExt cx="0" cy="0"/>
+        </a:xfrm>
+      </p:grpSpPr>
+      <p:sp>
+        <p:nvSpPr>
+          <p:cNvPr id="279" name="Google Shape;279;g32248793e7f_0_0"/>
           <p:cNvSpPr/>
           <p:nvPr/>
         </p:nvSpPr>
@@ -28945,7 +29988,7 @@
       </p:sp>
       <p:sp>
         <p:nvSpPr>
-          <p:cNvPr id="270" name="Google Shape;270;g32248793e7f_0_0"/>
+          <p:cNvPr id="280" name="Google Shape;280;g32248793e7f_0_0"/>
           <p:cNvSpPr/>
           <p:nvPr/>
         </p:nvSpPr>
@@ -29004,7 +30047,7 @@
       </p:sp>
       <p:sp>
         <p:nvSpPr>
-          <p:cNvPr id="271" name="Google Shape;271;g32248793e7f_0_0"/>
+          <p:cNvPr id="281" name="Google Shape;281;g32248793e7f_0_0"/>
           <p:cNvSpPr txBox="1"/>
           <p:nvPr>
             <p:ph type="title"/>
@@ -29064,7 +30107,7 @@
       </p:sp>
       <p:grpSp>
         <p:nvGrpSpPr>
-          <p:cNvPr id="272" name="Google Shape;272;g32248793e7f_0_0"/>
+          <p:cNvPr id="282" name="Google Shape;282;g32248793e7f_0_0"/>
           <p:cNvGrpSpPr/>
           <p:nvPr/>
         </p:nvGrpSpPr>
@@ -29078,7 +30121,7 @@
         </p:grpSpPr>
         <p:sp>
           <p:nvSpPr>
-            <p:cNvPr id="273" name="Google Shape;273;g32248793e7f_0_0"/>
+            <p:cNvPr id="283" name="Google Shape;283;g32248793e7f_0_0"/>
             <p:cNvSpPr/>
             <p:nvPr/>
           </p:nvSpPr>
@@ -29196,7 +30239,7 @@
         </p:sp>
         <p:sp>
           <p:nvSpPr>
-            <p:cNvPr id="274" name="Google Shape;274;g32248793e7f_0_0"/>
+            <p:cNvPr id="284" name="Google Shape;284;g32248793e7f_0_0"/>
             <p:cNvSpPr/>
             <p:nvPr/>
           </p:nvSpPr>
@@ -29315,7 +30358,7 @@
       </p:grpSp>
       <p:sp>
         <p:nvSpPr>
-          <p:cNvPr id="275" name="Google Shape;275;g32248793e7f_0_0"/>
+          <p:cNvPr id="285" name="Google Shape;285;g32248793e7f_0_0"/>
           <p:cNvSpPr/>
           <p:nvPr/>
         </p:nvSpPr>
@@ -29380,7 +30423,7 @@
       </p:sp>
       <p:sp>
         <p:nvSpPr>
-          <p:cNvPr id="276" name="Google Shape;276;g32248793e7f_0_0"/>
+          <p:cNvPr id="286" name="Google Shape;286;g32248793e7f_0_0"/>
           <p:cNvSpPr/>
           <p:nvPr/>
         </p:nvSpPr>
@@ -29394,7 +30437,7 @@
           </a:prstGeom>
           <a:solidFill>
             <a:schemeClr val="accent6">
-              <a:alpha val="29019"/>
+              <a:alpha val="28627"/>
             </a:schemeClr>
           </a:solidFill>
           <a:ln cap="flat" cmpd="sng" w="28575">
@@ -29447,7 +30490,7 @@
       </p:sp>
       <p:grpSp>
         <p:nvGrpSpPr>
-          <p:cNvPr id="277" name="Google Shape;277;g32248793e7f_0_0"/>
+          <p:cNvPr id="287" name="Google Shape;287;g32248793e7f_0_0"/>
           <p:cNvGrpSpPr/>
           <p:nvPr/>
         </p:nvGrpSpPr>
@@ -29461,7 +30504,7 @@
         </p:grpSpPr>
         <p:sp>
           <p:nvSpPr>
-            <p:cNvPr id="278" name="Google Shape;278;g32248793e7f_0_0"/>
+            <p:cNvPr id="288" name="Google Shape;288;g32248793e7f_0_0"/>
             <p:cNvSpPr/>
             <p:nvPr/>
           </p:nvSpPr>
@@ -29536,7 +30579,7 @@
         </p:sp>
         <p:sp>
           <p:nvSpPr>
-            <p:cNvPr id="279" name="Google Shape;279;g32248793e7f_0_0"/>
+            <p:cNvPr id="289" name="Google Shape;289;g32248793e7f_0_0"/>
             <p:cNvSpPr/>
             <p:nvPr/>
           </p:nvSpPr>
@@ -29619,7 +30662,7 @@
         </p:sp>
         <p:sp>
           <p:nvSpPr>
-            <p:cNvPr id="280" name="Google Shape;280;g32248793e7f_0_0"/>
+            <p:cNvPr id="290" name="Google Shape;290;g32248793e7f_0_0"/>
             <p:cNvSpPr/>
             <p:nvPr/>
           </p:nvSpPr>
@@ -29702,7 +30745,7 @@
         </p:sp>
         <p:sp>
           <p:nvSpPr>
-            <p:cNvPr id="281" name="Google Shape;281;g32248793e7f_0_0"/>
+            <p:cNvPr id="291" name="Google Shape;291;g32248793e7f_0_0"/>
             <p:cNvSpPr/>
             <p:nvPr/>
           </p:nvSpPr>
@@ -29785,7 +30828,7 @@
         </p:sp>
         <p:sp>
           <p:nvSpPr>
-            <p:cNvPr id="282" name="Google Shape;282;g32248793e7f_0_0"/>
+            <p:cNvPr id="292" name="Google Shape;292;g32248793e7f_0_0"/>
             <p:cNvSpPr/>
             <p:nvPr/>
           </p:nvSpPr>
@@ -29868,7 +30911,7 @@
         </p:sp>
         <p:sp>
           <p:nvSpPr>
-            <p:cNvPr id="283" name="Google Shape;283;g32248793e7f_0_0"/>
+            <p:cNvPr id="293" name="Google Shape;293;g32248793e7f_0_0"/>
             <p:cNvSpPr/>
             <p:nvPr/>
           </p:nvSpPr>
@@ -29951,7 +30994,7 @@
         </p:sp>
         <p:sp>
           <p:nvSpPr>
-            <p:cNvPr id="284" name="Google Shape;284;g32248793e7f_0_0"/>
+            <p:cNvPr id="294" name="Google Shape;294;g32248793e7f_0_0"/>
             <p:cNvSpPr/>
             <p:nvPr/>
           </p:nvSpPr>
@@ -30040,7 +31083,7 @@
         </p:sp>
         <p:sp>
           <p:nvSpPr>
-            <p:cNvPr id="285" name="Google Shape;285;g32248793e7f_0_0"/>
+            <p:cNvPr id="295" name="Google Shape;295;g32248793e7f_0_0"/>
             <p:cNvSpPr/>
             <p:nvPr/>
           </p:nvSpPr>
@@ -30120,7 +31163,7 @@
         </p:sp>
         <p:sp>
           <p:nvSpPr>
-            <p:cNvPr id="286" name="Google Shape;286;g32248793e7f_0_0"/>
+            <p:cNvPr id="296" name="Google Shape;296;g32248793e7f_0_0"/>
             <p:cNvSpPr/>
             <p:nvPr/>
           </p:nvSpPr>
@@ -30200,7 +31243,7 @@
         </p:sp>
         <p:sp>
           <p:nvSpPr>
-            <p:cNvPr id="287" name="Google Shape;287;g32248793e7f_0_0"/>
+            <p:cNvPr id="297" name="Google Shape;297;g32248793e7f_0_0"/>
             <p:cNvSpPr/>
             <p:nvPr/>
           </p:nvSpPr>
@@ -30280,7 +31323,7 @@
         </p:sp>
         <p:sp>
           <p:nvSpPr>
-            <p:cNvPr id="288" name="Google Shape;288;g32248793e7f_0_0"/>
+            <p:cNvPr id="298" name="Google Shape;298;g32248793e7f_0_0"/>
             <p:cNvSpPr/>
             <p:nvPr/>
           </p:nvSpPr>
@@ -30360,7 +31403,7 @@
         </p:sp>
         <p:sp>
           <p:nvSpPr>
-            <p:cNvPr id="289" name="Google Shape;289;g32248793e7f_0_0"/>
+            <p:cNvPr id="299" name="Google Shape;299;g32248793e7f_0_0"/>
             <p:cNvSpPr/>
             <p:nvPr/>
           </p:nvSpPr>
@@ -30440,7 +31483,7 @@
         </p:sp>
         <p:sp>
           <p:nvSpPr>
-            <p:cNvPr id="290" name="Google Shape;290;g32248793e7f_0_0"/>
+            <p:cNvPr id="300" name="Google Shape;300;g32248793e7f_0_0"/>
             <p:cNvSpPr/>
             <p:nvPr/>
           </p:nvSpPr>
@@ -30513,7 +31556,7 @@
       </p:grpSp>
       <p:grpSp>
         <p:nvGrpSpPr>
-          <p:cNvPr id="291" name="Google Shape;291;g32248793e7f_0_0"/>
+          <p:cNvPr id="301" name="Google Shape;301;g32248793e7f_0_0"/>
           <p:cNvGrpSpPr/>
           <p:nvPr/>
         </p:nvGrpSpPr>
@@ -30527,7 +31570,7 @@
         </p:grpSpPr>
         <p:sp>
           <p:nvSpPr>
-            <p:cNvPr id="292" name="Google Shape;292;g32248793e7f_0_0"/>
+            <p:cNvPr id="302" name="Google Shape;302;g32248793e7f_0_0"/>
             <p:cNvSpPr/>
             <p:nvPr/>
           </p:nvSpPr>
@@ -30588,7 +31631,7 @@
         </p:sp>
         <p:sp>
           <p:nvSpPr>
-            <p:cNvPr id="293" name="Google Shape;293;g32248793e7f_0_0"/>
+            <p:cNvPr id="303" name="Google Shape;303;g32248793e7f_0_0"/>
             <p:cNvSpPr/>
             <p:nvPr/>
           </p:nvSpPr>
@@ -30652,7 +31695,7 @@
         </p:sp>
         <p:sp>
           <p:nvSpPr>
-            <p:cNvPr id="294" name="Google Shape;294;g32248793e7f_0_0"/>
+            <p:cNvPr id="304" name="Google Shape;304;g32248793e7f_0_0"/>
             <p:cNvSpPr/>
             <p:nvPr/>
           </p:nvSpPr>
@@ -30709,7 +31752,7 @@
         </p:sp>
         <p:sp>
           <p:nvSpPr>
-            <p:cNvPr id="295" name="Google Shape;295;g32248793e7f_0_0"/>
+            <p:cNvPr id="305" name="Google Shape;305;g32248793e7f_0_0"/>
             <p:cNvSpPr txBox="1"/>
             <p:nvPr/>
           </p:nvSpPr>
@@ -30775,7 +31818,7 @@
         </p:sp>
         <p:sp>
           <p:nvSpPr>
-            <p:cNvPr id="296" name="Google Shape;296;g32248793e7f_0_0"/>
+            <p:cNvPr id="306" name="Google Shape;306;g32248793e7f_0_0"/>
             <p:cNvSpPr/>
             <p:nvPr/>
           </p:nvSpPr>
@@ -30836,7 +31879,7 @@
         </p:sp>
         <p:sp>
           <p:nvSpPr>
-            <p:cNvPr id="297" name="Google Shape;297;g32248793e7f_0_0"/>
+            <p:cNvPr id="307" name="Google Shape;307;g32248793e7f_0_0"/>
             <p:cNvSpPr/>
             <p:nvPr/>
           </p:nvSpPr>
@@ -30900,7 +31943,7 @@
         </p:sp>
         <p:sp>
           <p:nvSpPr>
-            <p:cNvPr id="298" name="Google Shape;298;g32248793e7f_0_0"/>
+            <p:cNvPr id="308" name="Google Shape;308;g32248793e7f_0_0"/>
             <p:cNvSpPr/>
             <p:nvPr/>
           </p:nvSpPr>
@@ -30957,7 +32000,7 @@
         </p:sp>
         <p:sp>
           <p:nvSpPr>
-            <p:cNvPr id="299" name="Google Shape;299;g32248793e7f_0_0"/>
+            <p:cNvPr id="309" name="Google Shape;309;g32248793e7f_0_0"/>
             <p:cNvSpPr txBox="1"/>
             <p:nvPr/>
           </p:nvSpPr>
@@ -31243,7 +32286,7 @@
         </p:sp>
         <p:sp>
           <p:nvSpPr>
-            <p:cNvPr id="300" name="Google Shape;300;g32248793e7f_0_0"/>
+            <p:cNvPr id="310" name="Google Shape;310;g32248793e7f_0_0"/>
             <p:cNvSpPr/>
             <p:nvPr/>
           </p:nvSpPr>
@@ -31304,7 +32347,7 @@
         </p:sp>
         <p:sp>
           <p:nvSpPr>
-            <p:cNvPr id="301" name="Google Shape;301;g32248793e7f_0_0"/>
+            <p:cNvPr id="311" name="Google Shape;311;g32248793e7f_0_0"/>
             <p:cNvSpPr/>
             <p:nvPr/>
           </p:nvSpPr>
@@ -31368,7 +32411,7 @@
         </p:sp>
         <p:sp>
           <p:nvSpPr>
-            <p:cNvPr id="302" name="Google Shape;302;g32248793e7f_0_0"/>
+            <p:cNvPr id="312" name="Google Shape;312;g32248793e7f_0_0"/>
             <p:cNvSpPr/>
             <p:nvPr/>
           </p:nvSpPr>
@@ -31425,7 +32468,7 @@
         </p:sp>
         <p:sp>
           <p:nvSpPr>
-            <p:cNvPr id="303" name="Google Shape;303;g32248793e7f_0_0"/>
+            <p:cNvPr id="313" name="Google Shape;313;g32248793e7f_0_0"/>
             <p:cNvSpPr txBox="1"/>
             <p:nvPr/>
           </p:nvSpPr>
@@ -31503,7 +32546,7 @@
         </p:sp>
         <p:sp>
           <p:nvSpPr>
-            <p:cNvPr id="304" name="Google Shape;304;g32248793e7f_0_0"/>
+            <p:cNvPr id="314" name="Google Shape;314;g32248793e7f_0_0"/>
             <p:cNvSpPr/>
             <p:nvPr/>
           </p:nvSpPr>
@@ -31564,7 +32607,7 @@
         </p:sp>
         <p:sp>
           <p:nvSpPr>
-            <p:cNvPr id="305" name="Google Shape;305;g32248793e7f_0_0"/>
+            <p:cNvPr id="315" name="Google Shape;315;g32248793e7f_0_0"/>
             <p:cNvSpPr/>
             <p:nvPr/>
           </p:nvSpPr>
@@ -31636,7 +32679,7 @@
         </p:sp>
         <p:sp>
           <p:nvSpPr>
-            <p:cNvPr id="306" name="Google Shape;306;g32248793e7f_0_0"/>
+            <p:cNvPr id="316" name="Google Shape;316;g32248793e7f_0_0"/>
             <p:cNvSpPr/>
             <p:nvPr/>
           </p:nvSpPr>
@@ -31693,7 +32736,7 @@
         </p:sp>
         <p:sp>
           <p:nvSpPr>
-            <p:cNvPr id="307" name="Google Shape;307;g32248793e7f_0_0"/>
+            <p:cNvPr id="317" name="Google Shape;317;g32248793e7f_0_0"/>
             <p:cNvSpPr txBox="1"/>
             <p:nvPr/>
           </p:nvSpPr>
@@ -31795,7 +32838,7 @@
       </p:grpSp>
       <p:pic>
         <p:nvPicPr>
-          <p:cNvPr id="308" name="Google Shape;308;g32248793e7f_0_0"/>
+          <p:cNvPr id="318" name="Google Shape;318;g32248793e7f_0_0"/>
           <p:cNvPicPr preferRelativeResize="0"/>
           <p:nvPr/>
         </p:nvPicPr>
@@ -31822,7 +32865,7 @@
       </p:pic>
       <p:pic>
         <p:nvPicPr>
-          <p:cNvPr id="309" name="Google Shape;309;g32248793e7f_0_0"/>
+          <p:cNvPr id="319" name="Google Shape;319;g32248793e7f_0_0"/>
           <p:cNvPicPr preferRelativeResize="0"/>
           <p:nvPr/>
         </p:nvPicPr>
@@ -32395,13 +33438,13 @@
           </a:custGeom>
           <a:solidFill>
             <a:schemeClr val="accent2">
-              <a:alpha val="74117"/>
+              <a:alpha val="73725"/>
             </a:schemeClr>
           </a:solidFill>
           <a:ln cap="rnd" cmpd="sng" w="44450">
             <a:solidFill>
               <a:schemeClr val="accent2">
-                <a:alpha val="74117"/>
+                <a:alpha val="73725"/>
               </a:schemeClr>
             </a:solidFill>
             <a:prstDash val="solid"/>
@@ -33223,13 +34266,13 @@
           </a:custGeom>
           <a:solidFill>
             <a:schemeClr val="accent2">
-              <a:alpha val="73725"/>
+              <a:alpha val="73333"/>
             </a:schemeClr>
           </a:solidFill>
           <a:ln cap="rnd" cmpd="sng" w="44450">
             <a:solidFill>
               <a:schemeClr val="accent2">
-                <a:alpha val="73725"/>
+                <a:alpha val="73333"/>
               </a:schemeClr>
             </a:solidFill>
             <a:prstDash val="solid"/>
@@ -34025,13 +35068,13 @@
           </a:custGeom>
           <a:solidFill>
             <a:schemeClr val="accent2">
-              <a:alpha val="74117"/>
+              <a:alpha val="73725"/>
             </a:schemeClr>
           </a:solidFill>
           <a:ln cap="rnd" cmpd="sng" w="44450">
             <a:solidFill>
               <a:schemeClr val="accent2">
-                <a:alpha val="74117"/>
+                <a:alpha val="73725"/>
               </a:schemeClr>
             </a:solidFill>
             <a:prstDash val="solid"/>
@@ -34858,13 +35901,13 @@
           </a:custGeom>
           <a:solidFill>
             <a:schemeClr val="accent2">
-              <a:alpha val="74117"/>
+              <a:alpha val="73725"/>
             </a:schemeClr>
           </a:solidFill>
           <a:ln cap="rnd" cmpd="sng" w="44450">
             <a:solidFill>
               <a:schemeClr val="accent2">
-                <a:alpha val="74117"/>
+                <a:alpha val="73725"/>
               </a:schemeClr>
             </a:solidFill>
             <a:prstDash val="solid"/>
@@ -36242,13 +37285,13 @@
           </a:custGeom>
           <a:solidFill>
             <a:schemeClr val="accent2">
-              <a:alpha val="74117"/>
+              <a:alpha val="73725"/>
             </a:schemeClr>
           </a:solidFill>
           <a:ln cap="rnd" cmpd="sng" w="44450">
             <a:solidFill>
               <a:schemeClr val="accent2">
-                <a:alpha val="74117"/>
+                <a:alpha val="73725"/>
               </a:schemeClr>
             </a:solidFill>
             <a:prstDash val="solid"/>
@@ -37036,13 +38079,13 @@
           </a:custGeom>
           <a:solidFill>
             <a:schemeClr val="accent2">
-              <a:alpha val="74117"/>
+              <a:alpha val="73725"/>
             </a:schemeClr>
           </a:solidFill>
           <a:ln cap="rnd" cmpd="sng" w="44450">
             <a:solidFill>
               <a:schemeClr val="accent2">
-                <a:alpha val="74117"/>
+                <a:alpha val="73725"/>
               </a:schemeClr>
             </a:solidFill>
             <a:prstDash val="solid"/>
@@ -37720,13 +38763,13 @@
           </a:custGeom>
           <a:solidFill>
             <a:schemeClr val="accent2">
-              <a:alpha val="74117"/>
+              <a:alpha val="73725"/>
             </a:schemeClr>
           </a:solidFill>
           <a:ln cap="rnd" cmpd="sng" w="44450">
             <a:solidFill>
               <a:schemeClr val="accent2">
-                <a:alpha val="74117"/>
+                <a:alpha val="73725"/>
               </a:schemeClr>
             </a:solidFill>
             <a:prstDash val="solid"/>
@@ -38108,16 +39151,7 @@
                 <a:cs typeface="Calibri"/>
                 <a:sym typeface="Calibri"/>
               </a:rPr>
-              <a:t>AI &amp; </a:t>
-            </a:r>
-            <a:r>
-              <a:rPr lang="en-US">
-                <a:latin typeface="Calibri"/>
-                <a:ea typeface="Calibri"/>
-                <a:cs typeface="Calibri"/>
-                <a:sym typeface="Calibri"/>
-              </a:rPr>
-              <a:t>Data Science</a:t>
+              <a:t>AI &amp; Data Science</a:t>
             </a:r>
             <a:endParaRPr/>
           </a:p>
@@ -38523,13 +39557,13 @@
           </a:custGeom>
           <a:solidFill>
             <a:schemeClr val="accent2">
-              <a:alpha val="74117"/>
+              <a:alpha val="73725"/>
             </a:schemeClr>
           </a:solidFill>
           <a:ln cap="rnd" cmpd="sng" w="44450">
             <a:solidFill>
               <a:schemeClr val="accent2">
-                <a:alpha val="74117"/>
+                <a:alpha val="73725"/>
               </a:schemeClr>
             </a:solidFill>
             <a:prstDash val="solid"/>
